--- a/FA_BiLSTM_单页架构图_一页版.pptx
+++ b/FA_BiLSTM_单页架构图_一页版.pptx
@@ -5,9 +5,9 @@
     <p:sldMasterId id="2147483648" r:id="rId1"/>
   </p:sldMasterIdLst>
   <p:sldIdLst>
-    <p:sldId id="256" r:id="rId2"/>
+    <p:sldId id="256" r:id="rId7"/>
   </p:sldIdLst>
-  <p:sldSz cx="12192000" cy="6858000"/>
+  <p:sldSz cx="12192119" cy="6858000" type="screen4x3"/>
   <p:notesSz cx="6858000" cy="9144000"/>
   <p:defaultTextStyle>
     <a:defPPr>
@@ -104,22 +104,6 @@
       </a:defRPr>
     </a:lvl9pPr>
   </p:defaultTextStyle>
-  <p:extLst>
-    <p:ext uri="{EFAFB233-063F-42B5-8137-9DF3F51BA10A}">
-      <p15:sldGuideLst xmlns:p15="http://schemas.microsoft.com/office/powerpoint/2012/main">
-        <p15:guide id="1" orient="horz" pos="2160">
-          <p15:clr>
-            <a:srgbClr val="A4A3A4"/>
-          </p15:clr>
-        </p15:guide>
-        <p15:guide id="2" pos="2880">
-          <p15:clr>
-            <a:srgbClr val="A4A3A4"/>
-          </p15:clr>
-        </p15:guide>
-      </p15:sldGuideLst>
-    </p:ext>
-  </p:extLst>
 </p:presentation>
 </file>
 
@@ -161,9 +145,10 @@
           <a:lstStyle/>
           <a:p>
             <a:r>
-              <a:rPr lang="en-US"/>
+              <a:rPr lang="en-US" smtClean="0"/>
               <a:t>Click to edit Master title style</a:t>
             </a:r>
+            <a:endParaRPr lang="en-US"/>
           </a:p>
         </p:txBody>
       </p:sp>
@@ -279,9 +264,10 @@
           </a:lstStyle>
           <a:p>
             <a:r>
-              <a:rPr lang="en-US"/>
+              <a:rPr lang="en-US" smtClean="0"/>
               <a:t>Click to edit Master subtitle style</a:t>
             </a:r>
+            <a:endParaRPr lang="en-US"/>
           </a:p>
         </p:txBody>
       </p:sp>
@@ -302,7 +288,7 @@
           <a:p>
             <a:fld id="{5BCAD085-E8A6-8845-BD4E-CB4CCA059FC4}" type="datetimeFigureOut">
               <a:rPr lang="en-US" smtClean="0"/>
-              <a:t>4/5/2026</a:t>
+              <a:t>1/27/13</a:t>
             </a:fld>
             <a:endParaRPr lang="en-US"/>
           </a:p>
@@ -396,9 +382,10 @@
           <a:lstStyle/>
           <a:p>
             <a:r>
-              <a:rPr lang="en-US"/>
+              <a:rPr lang="en-US" smtClean="0"/>
               <a:t>Click to edit Master title style</a:t>
             </a:r>
+            <a:endParaRPr lang="en-US"/>
           </a:p>
         </p:txBody>
       </p:sp>
@@ -419,37 +406,38 @@
           <a:p>
             <a:pPr lvl="0"/>
             <a:r>
-              <a:rPr lang="en-US"/>
+              <a:rPr lang="en-US" smtClean="0"/>
               <a:t>Click to edit Master text styles</a:t>
             </a:r>
           </a:p>
           <a:p>
             <a:pPr lvl="1"/>
             <a:r>
-              <a:rPr lang="en-US"/>
+              <a:rPr lang="en-US" smtClean="0"/>
               <a:t>Second level</a:t>
             </a:r>
           </a:p>
           <a:p>
             <a:pPr lvl="2"/>
             <a:r>
-              <a:rPr lang="en-US"/>
+              <a:rPr lang="en-US" smtClean="0"/>
               <a:t>Third level</a:t>
             </a:r>
           </a:p>
           <a:p>
             <a:pPr lvl="3"/>
             <a:r>
-              <a:rPr lang="en-US"/>
+              <a:rPr lang="en-US" smtClean="0"/>
               <a:t>Fourth level</a:t>
             </a:r>
           </a:p>
           <a:p>
             <a:pPr lvl="4"/>
             <a:r>
-              <a:rPr lang="en-US"/>
+              <a:rPr lang="en-US" smtClean="0"/>
               <a:t>Fifth level</a:t>
             </a:r>
+            <a:endParaRPr lang="en-US"/>
           </a:p>
         </p:txBody>
       </p:sp>
@@ -470,7 +458,7 @@
           <a:p>
             <a:fld id="{5BCAD085-E8A6-8845-BD4E-CB4CCA059FC4}" type="datetimeFigureOut">
               <a:rPr lang="en-US" smtClean="0"/>
-              <a:t>4/5/2026</a:t>
+              <a:t>1/27/13</a:t>
             </a:fld>
             <a:endParaRPr lang="en-US"/>
           </a:p>
@@ -569,9 +557,10 @@
           <a:lstStyle/>
           <a:p>
             <a:r>
-              <a:rPr lang="en-US"/>
+              <a:rPr lang="en-US" smtClean="0"/>
               <a:t>Click to edit Master title style</a:t>
             </a:r>
+            <a:endParaRPr lang="en-US"/>
           </a:p>
         </p:txBody>
       </p:sp>
@@ -597,37 +586,38 @@
           <a:p>
             <a:pPr lvl="0"/>
             <a:r>
-              <a:rPr lang="en-US"/>
+              <a:rPr lang="en-US" smtClean="0"/>
               <a:t>Click to edit Master text styles</a:t>
             </a:r>
           </a:p>
           <a:p>
             <a:pPr lvl="1"/>
             <a:r>
-              <a:rPr lang="en-US"/>
+              <a:rPr lang="en-US" smtClean="0"/>
               <a:t>Second level</a:t>
             </a:r>
           </a:p>
           <a:p>
             <a:pPr lvl="2"/>
             <a:r>
-              <a:rPr lang="en-US"/>
+              <a:rPr lang="en-US" smtClean="0"/>
               <a:t>Third level</a:t>
             </a:r>
           </a:p>
           <a:p>
             <a:pPr lvl="3"/>
             <a:r>
-              <a:rPr lang="en-US"/>
+              <a:rPr lang="en-US" smtClean="0"/>
               <a:t>Fourth level</a:t>
             </a:r>
           </a:p>
           <a:p>
             <a:pPr lvl="4"/>
             <a:r>
-              <a:rPr lang="en-US"/>
+              <a:rPr lang="en-US" smtClean="0"/>
               <a:t>Fifth level</a:t>
             </a:r>
+            <a:endParaRPr lang="en-US"/>
           </a:p>
         </p:txBody>
       </p:sp>
@@ -648,7 +638,7 @@
           <a:p>
             <a:fld id="{5BCAD085-E8A6-8845-BD4E-CB4CCA059FC4}" type="datetimeFigureOut">
               <a:rPr lang="en-US" smtClean="0"/>
-              <a:t>4/5/2026</a:t>
+              <a:t>1/27/13</a:t>
             </a:fld>
             <a:endParaRPr lang="en-US"/>
           </a:p>
@@ -742,9 +732,10 @@
           <a:lstStyle/>
           <a:p>
             <a:r>
-              <a:rPr lang="en-US"/>
+              <a:rPr lang="en-US" smtClean="0"/>
               <a:t>Click to edit Master title style</a:t>
             </a:r>
+            <a:endParaRPr lang="en-US"/>
           </a:p>
         </p:txBody>
       </p:sp>
@@ -765,37 +756,38 @@
           <a:p>
             <a:pPr lvl="0"/>
             <a:r>
-              <a:rPr lang="en-US"/>
+              <a:rPr lang="en-US" smtClean="0"/>
               <a:t>Click to edit Master text styles</a:t>
             </a:r>
           </a:p>
           <a:p>
             <a:pPr lvl="1"/>
             <a:r>
-              <a:rPr lang="en-US"/>
+              <a:rPr lang="en-US" smtClean="0"/>
               <a:t>Second level</a:t>
             </a:r>
           </a:p>
           <a:p>
             <a:pPr lvl="2"/>
             <a:r>
-              <a:rPr lang="en-US"/>
+              <a:rPr lang="en-US" smtClean="0"/>
               <a:t>Third level</a:t>
             </a:r>
           </a:p>
           <a:p>
             <a:pPr lvl="3"/>
             <a:r>
-              <a:rPr lang="en-US"/>
+              <a:rPr lang="en-US" smtClean="0"/>
               <a:t>Fourth level</a:t>
             </a:r>
           </a:p>
           <a:p>
             <a:pPr lvl="4"/>
             <a:r>
-              <a:rPr lang="en-US"/>
+              <a:rPr lang="en-US" smtClean="0"/>
               <a:t>Fifth level</a:t>
             </a:r>
+            <a:endParaRPr lang="en-US"/>
           </a:p>
         </p:txBody>
       </p:sp>
@@ -816,7 +808,7 @@
           <a:p>
             <a:fld id="{5BCAD085-E8A6-8845-BD4E-CB4CCA059FC4}" type="datetimeFigureOut">
               <a:rPr lang="en-US" smtClean="0"/>
-              <a:t>4/5/2026</a:t>
+              <a:t>1/27/13</a:t>
             </a:fld>
             <a:endParaRPr lang="en-US"/>
           </a:p>
@@ -919,9 +911,10 @@
           </a:lstStyle>
           <a:p>
             <a:r>
-              <a:rPr lang="en-US"/>
+              <a:rPr lang="en-US" smtClean="0"/>
               <a:t>Click to edit Master title style</a:t>
             </a:r>
+            <a:endParaRPr lang="en-US"/>
           </a:p>
         </p:txBody>
       </p:sp>
@@ -1038,7 +1031,7 @@
           <a:p>
             <a:pPr lvl="0"/>
             <a:r>
-              <a:rPr lang="en-US"/>
+              <a:rPr lang="en-US" smtClean="0"/>
               <a:t>Click to edit Master text styles</a:t>
             </a:r>
           </a:p>
@@ -1061,7 +1054,7 @@
           <a:p>
             <a:fld id="{5BCAD085-E8A6-8845-BD4E-CB4CCA059FC4}" type="datetimeFigureOut">
               <a:rPr lang="en-US" smtClean="0"/>
-              <a:t>4/5/2026</a:t>
+              <a:t>1/27/13</a:t>
             </a:fld>
             <a:endParaRPr lang="en-US"/>
           </a:p>
@@ -1155,9 +1148,10 @@
           <a:lstStyle/>
           <a:p>
             <a:r>
-              <a:rPr lang="en-US"/>
+              <a:rPr lang="en-US" smtClean="0"/>
               <a:t>Click to edit Master title style</a:t>
             </a:r>
+            <a:endParaRPr lang="en-US"/>
           </a:p>
         </p:txBody>
       </p:sp>
@@ -1211,37 +1205,38 @@
           <a:p>
             <a:pPr lvl="0"/>
             <a:r>
-              <a:rPr lang="en-US"/>
+              <a:rPr lang="en-US" smtClean="0"/>
               <a:t>Click to edit Master text styles</a:t>
             </a:r>
           </a:p>
           <a:p>
             <a:pPr lvl="1"/>
             <a:r>
-              <a:rPr lang="en-US"/>
+              <a:rPr lang="en-US" smtClean="0"/>
               <a:t>Second level</a:t>
             </a:r>
           </a:p>
           <a:p>
             <a:pPr lvl="2"/>
             <a:r>
-              <a:rPr lang="en-US"/>
+              <a:rPr lang="en-US" smtClean="0"/>
               <a:t>Third level</a:t>
             </a:r>
           </a:p>
           <a:p>
             <a:pPr lvl="3"/>
             <a:r>
-              <a:rPr lang="en-US"/>
+              <a:rPr lang="en-US" smtClean="0"/>
               <a:t>Fourth level</a:t>
             </a:r>
           </a:p>
           <a:p>
             <a:pPr lvl="4"/>
             <a:r>
-              <a:rPr lang="en-US"/>
+              <a:rPr lang="en-US" smtClean="0"/>
               <a:t>Fifth level</a:t>
             </a:r>
+            <a:endParaRPr lang="en-US"/>
           </a:p>
         </p:txBody>
       </p:sp>
@@ -1295,37 +1290,38 @@
           <a:p>
             <a:pPr lvl="0"/>
             <a:r>
-              <a:rPr lang="en-US"/>
+              <a:rPr lang="en-US" smtClean="0"/>
               <a:t>Click to edit Master text styles</a:t>
             </a:r>
           </a:p>
           <a:p>
             <a:pPr lvl="1"/>
             <a:r>
-              <a:rPr lang="en-US"/>
+              <a:rPr lang="en-US" smtClean="0"/>
               <a:t>Second level</a:t>
             </a:r>
           </a:p>
           <a:p>
             <a:pPr lvl="2"/>
             <a:r>
-              <a:rPr lang="en-US"/>
+              <a:rPr lang="en-US" smtClean="0"/>
               <a:t>Third level</a:t>
             </a:r>
           </a:p>
           <a:p>
             <a:pPr lvl="3"/>
             <a:r>
-              <a:rPr lang="en-US"/>
+              <a:rPr lang="en-US" smtClean="0"/>
               <a:t>Fourth level</a:t>
             </a:r>
           </a:p>
           <a:p>
             <a:pPr lvl="4"/>
             <a:r>
-              <a:rPr lang="en-US"/>
+              <a:rPr lang="en-US" smtClean="0"/>
               <a:t>Fifth level</a:t>
             </a:r>
+            <a:endParaRPr lang="en-US"/>
           </a:p>
         </p:txBody>
       </p:sp>
@@ -1346,7 +1342,7 @@
           <a:p>
             <a:fld id="{5BCAD085-E8A6-8845-BD4E-CB4CCA059FC4}" type="datetimeFigureOut">
               <a:rPr lang="en-US" smtClean="0"/>
-              <a:t>4/5/2026</a:t>
+              <a:t>1/27/13</a:t>
             </a:fld>
             <a:endParaRPr lang="en-US"/>
           </a:p>
@@ -1444,9 +1440,10 @@
           </a:lstStyle>
           <a:p>
             <a:r>
-              <a:rPr lang="en-US"/>
+              <a:rPr lang="en-US" smtClean="0"/>
               <a:t>Click to edit Master title style</a:t>
             </a:r>
+            <a:endParaRPr lang="en-US"/>
           </a:p>
         </p:txBody>
       </p:sp>
@@ -1509,7 +1506,7 @@
           <a:p>
             <a:pPr lvl="0"/>
             <a:r>
-              <a:rPr lang="en-US"/>
+              <a:rPr lang="en-US" smtClean="0"/>
               <a:t>Click to edit Master text styles</a:t>
             </a:r>
           </a:p>
@@ -1565,37 +1562,38 @@
           <a:p>
             <a:pPr lvl="0"/>
             <a:r>
-              <a:rPr lang="en-US"/>
+              <a:rPr lang="en-US" smtClean="0"/>
               <a:t>Click to edit Master text styles</a:t>
             </a:r>
           </a:p>
           <a:p>
             <a:pPr lvl="1"/>
             <a:r>
-              <a:rPr lang="en-US"/>
+              <a:rPr lang="en-US" smtClean="0"/>
               <a:t>Second level</a:t>
             </a:r>
           </a:p>
           <a:p>
             <a:pPr lvl="2"/>
             <a:r>
-              <a:rPr lang="en-US"/>
+              <a:rPr lang="en-US" smtClean="0"/>
               <a:t>Third level</a:t>
             </a:r>
           </a:p>
           <a:p>
             <a:pPr lvl="3"/>
             <a:r>
-              <a:rPr lang="en-US"/>
+              <a:rPr lang="en-US" smtClean="0"/>
               <a:t>Fourth level</a:t>
             </a:r>
           </a:p>
           <a:p>
             <a:pPr lvl="4"/>
             <a:r>
-              <a:rPr lang="en-US"/>
+              <a:rPr lang="en-US" smtClean="0"/>
               <a:t>Fifth level</a:t>
             </a:r>
+            <a:endParaRPr lang="en-US"/>
           </a:p>
         </p:txBody>
       </p:sp>
@@ -1658,7 +1656,7 @@
           <a:p>
             <a:pPr lvl="0"/>
             <a:r>
-              <a:rPr lang="en-US"/>
+              <a:rPr lang="en-US" smtClean="0"/>
               <a:t>Click to edit Master text styles</a:t>
             </a:r>
           </a:p>
@@ -1714,37 +1712,38 @@
           <a:p>
             <a:pPr lvl="0"/>
             <a:r>
-              <a:rPr lang="en-US"/>
+              <a:rPr lang="en-US" smtClean="0"/>
               <a:t>Click to edit Master text styles</a:t>
             </a:r>
           </a:p>
           <a:p>
             <a:pPr lvl="1"/>
             <a:r>
-              <a:rPr lang="en-US"/>
+              <a:rPr lang="en-US" smtClean="0"/>
               <a:t>Second level</a:t>
             </a:r>
           </a:p>
           <a:p>
             <a:pPr lvl="2"/>
             <a:r>
-              <a:rPr lang="en-US"/>
+              <a:rPr lang="en-US" smtClean="0"/>
               <a:t>Third level</a:t>
             </a:r>
           </a:p>
           <a:p>
             <a:pPr lvl="3"/>
             <a:r>
-              <a:rPr lang="en-US"/>
+              <a:rPr lang="en-US" smtClean="0"/>
               <a:t>Fourth level</a:t>
             </a:r>
           </a:p>
           <a:p>
             <a:pPr lvl="4"/>
             <a:r>
-              <a:rPr lang="en-US"/>
+              <a:rPr lang="en-US" smtClean="0"/>
               <a:t>Fifth level</a:t>
             </a:r>
+            <a:endParaRPr lang="en-US"/>
           </a:p>
         </p:txBody>
       </p:sp>
@@ -1765,7 +1764,7 @@
           <a:p>
             <a:fld id="{5BCAD085-E8A6-8845-BD4E-CB4CCA059FC4}" type="datetimeFigureOut">
               <a:rPr lang="en-US" smtClean="0"/>
-              <a:t>4/5/2026</a:t>
+              <a:t>1/27/13</a:t>
             </a:fld>
             <a:endParaRPr lang="en-US"/>
           </a:p>
@@ -1859,9 +1858,10 @@
           <a:lstStyle/>
           <a:p>
             <a:r>
-              <a:rPr lang="en-US"/>
+              <a:rPr lang="en-US" smtClean="0"/>
               <a:t>Click to edit Master title style</a:t>
             </a:r>
+            <a:endParaRPr lang="en-US"/>
           </a:p>
         </p:txBody>
       </p:sp>
@@ -1882,7 +1882,7 @@
           <a:p>
             <a:fld id="{5BCAD085-E8A6-8845-BD4E-CB4CCA059FC4}" type="datetimeFigureOut">
               <a:rPr lang="en-US" smtClean="0"/>
-              <a:t>4/5/2026</a:t>
+              <a:t>1/27/13</a:t>
             </a:fld>
             <a:endParaRPr lang="en-US"/>
           </a:p>
@@ -1977,7 +1977,7 @@
           <a:p>
             <a:fld id="{5BCAD085-E8A6-8845-BD4E-CB4CCA059FC4}" type="datetimeFigureOut">
               <a:rPr lang="en-US" smtClean="0"/>
-              <a:t>4/5/2026</a:t>
+              <a:t>1/27/13</a:t>
             </a:fld>
             <a:endParaRPr lang="en-US"/>
           </a:p>
@@ -2080,9 +2080,10 @@
           </a:lstStyle>
           <a:p>
             <a:r>
-              <a:rPr lang="en-US"/>
+              <a:rPr lang="en-US" smtClean="0"/>
               <a:t>Click to edit Master title style</a:t>
             </a:r>
+            <a:endParaRPr lang="en-US"/>
           </a:p>
         </p:txBody>
       </p:sp>
@@ -2136,37 +2137,38 @@
           <a:p>
             <a:pPr lvl="0"/>
             <a:r>
-              <a:rPr lang="en-US"/>
+              <a:rPr lang="en-US" smtClean="0"/>
               <a:t>Click to edit Master text styles</a:t>
             </a:r>
           </a:p>
           <a:p>
             <a:pPr lvl="1"/>
             <a:r>
-              <a:rPr lang="en-US"/>
+              <a:rPr lang="en-US" smtClean="0"/>
               <a:t>Second level</a:t>
             </a:r>
           </a:p>
           <a:p>
             <a:pPr lvl="2"/>
             <a:r>
-              <a:rPr lang="en-US"/>
+              <a:rPr lang="en-US" smtClean="0"/>
               <a:t>Third level</a:t>
             </a:r>
           </a:p>
           <a:p>
             <a:pPr lvl="3"/>
             <a:r>
-              <a:rPr lang="en-US"/>
+              <a:rPr lang="en-US" smtClean="0"/>
               <a:t>Fourth level</a:t>
             </a:r>
           </a:p>
           <a:p>
             <a:pPr lvl="4"/>
             <a:r>
-              <a:rPr lang="en-US"/>
+              <a:rPr lang="en-US" smtClean="0"/>
               <a:t>Fifth level</a:t>
             </a:r>
+            <a:endParaRPr lang="en-US"/>
           </a:p>
         </p:txBody>
       </p:sp>
@@ -2229,7 +2231,7 @@
           <a:p>
             <a:pPr lvl="0"/>
             <a:r>
-              <a:rPr lang="en-US"/>
+              <a:rPr lang="en-US" smtClean="0"/>
               <a:t>Click to edit Master text styles</a:t>
             </a:r>
           </a:p>
@@ -2252,7 +2254,7 @@
           <a:p>
             <a:fld id="{5BCAD085-E8A6-8845-BD4E-CB4CCA059FC4}" type="datetimeFigureOut">
               <a:rPr lang="en-US" smtClean="0"/>
-              <a:t>4/5/2026</a:t>
+              <a:t>1/27/13</a:t>
             </a:fld>
             <a:endParaRPr lang="en-US"/>
           </a:p>
@@ -2355,9 +2357,10 @@
           </a:lstStyle>
           <a:p>
             <a:r>
-              <a:rPr lang="en-US"/>
+              <a:rPr lang="en-US" smtClean="0"/>
               <a:t>Click to edit Master title style</a:t>
             </a:r>
+            <a:endParaRPr lang="en-US"/>
           </a:p>
         </p:txBody>
       </p:sp>
@@ -2481,7 +2484,7 @@
           <a:p>
             <a:pPr lvl="0"/>
             <a:r>
-              <a:rPr lang="en-US"/>
+              <a:rPr lang="en-US" smtClean="0"/>
               <a:t>Click to edit Master text styles</a:t>
             </a:r>
           </a:p>
@@ -2504,7 +2507,7 @@
           <a:p>
             <a:fld id="{5BCAD085-E8A6-8845-BD4E-CB4CCA059FC4}" type="datetimeFigureOut">
               <a:rPr lang="en-US" smtClean="0"/>
-              <a:t>4/5/2026</a:t>
+              <a:t>1/27/13</a:t>
             </a:fld>
             <a:endParaRPr lang="en-US"/>
           </a:p>
@@ -2613,9 +2616,10 @@
           <a:lstStyle/>
           <a:p>
             <a:r>
-              <a:rPr lang="en-US"/>
+              <a:rPr lang="en-US" smtClean="0"/>
               <a:t>Click to edit Master title style</a:t>
             </a:r>
+            <a:endParaRPr lang="en-US"/>
           </a:p>
         </p:txBody>
       </p:sp>
@@ -2646,37 +2650,38 @@
           <a:p>
             <a:pPr lvl="0"/>
             <a:r>
-              <a:rPr lang="en-US"/>
+              <a:rPr lang="en-US" smtClean="0"/>
               <a:t>Click to edit Master text styles</a:t>
             </a:r>
           </a:p>
           <a:p>
             <a:pPr lvl="1"/>
             <a:r>
-              <a:rPr lang="en-US"/>
+              <a:rPr lang="en-US" smtClean="0"/>
               <a:t>Second level</a:t>
             </a:r>
           </a:p>
           <a:p>
             <a:pPr lvl="2"/>
             <a:r>
-              <a:rPr lang="en-US"/>
+              <a:rPr lang="en-US" smtClean="0"/>
               <a:t>Third level</a:t>
             </a:r>
           </a:p>
           <a:p>
             <a:pPr lvl="3"/>
             <a:r>
-              <a:rPr lang="en-US"/>
+              <a:rPr lang="en-US" smtClean="0"/>
               <a:t>Fourth level</a:t>
             </a:r>
           </a:p>
           <a:p>
             <a:pPr lvl="4"/>
             <a:r>
-              <a:rPr lang="en-US"/>
+              <a:rPr lang="en-US" smtClean="0"/>
               <a:t>Fifth level</a:t>
             </a:r>
+            <a:endParaRPr lang="en-US"/>
           </a:p>
         </p:txBody>
       </p:sp>
@@ -2715,7 +2720,7 @@
           <a:p>
             <a:fld id="{5BCAD085-E8A6-8845-BD4E-CB4CCA059FC4}" type="datetimeFigureOut">
               <a:rPr lang="en-US" smtClean="0"/>
-              <a:t>4/5/2026</a:t>
+              <a:t>1/27/13</a:t>
             </a:fld>
             <a:endParaRPr lang="en-US"/>
           </a:p>
@@ -3074,7 +3079,7 @@
 </file>
 
 <file path=ppt/slides/slide1.xml><?xml version="1.0" encoding="utf-8"?>
-<p:sld xmlns:a="http://schemas.openxmlformats.org/drawingml/2006/main" xmlns:r="http://schemas.openxmlformats.org/officeDocument/2006/relationships" xmlns:p="http://schemas.openxmlformats.org/presentationml/2006/main">
+<p:sld xmlns:a="http://schemas.openxmlformats.org/drawingml/2006/main" xmlns:p="http://schemas.openxmlformats.org/presentationml/2006/main" xmlns:r="http://schemas.openxmlformats.org/officeDocument/2006/relationships">
   <p:cSld>
     <p:bg>
       <p:bgPr>
@@ -3090,14 +3095,7 @@
         <p:cNvGrpSpPr/>
         <p:nvPr/>
       </p:nvGrpSpPr>
-      <p:grpSpPr>
-        <a:xfrm>
-          <a:off x="0" y="0"/>
-          <a:ext cx="0" cy="0"/>
-          <a:chOff x="0" y="0"/>
-          <a:chExt cx="0" cy="0"/>
-        </a:xfrm>
-      </p:grpSpPr>
+      <p:grpSpPr/>
       <p:sp>
         <p:nvSpPr>
           <p:cNvPr id="2" name="TextBox 1"/>
@@ -3106,8 +3104,8 @@
         </p:nvSpPr>
         <p:spPr>
           <a:xfrm>
-            <a:off x="360000" y="165168"/>
-            <a:ext cx="11160000" cy="461665"/>
+            <a:off x="360000" y="180000"/>
+            <a:ext cx="11160000" cy="432000"/>
           </a:xfrm>
           <a:prstGeom prst="rect">
             <a:avLst/>
@@ -3122,62 +3120,14 @@
           <a:p>
             <a:pPr algn="ctr"/>
             <a:r>
-              <a:rPr sz="2400" b="1" dirty="0">
+              <a:rPr sz="2400" b="1">
                 <a:solidFill>
                   <a:srgbClr val="203A5C"/>
                 </a:solidFill>
-                <a:latin typeface="微软雅黑" panose="020B0503020204020204" pitchFamily="34" charset="-122"/>
-                <a:ea typeface="微软雅黑" panose="020B0503020204020204" pitchFamily="34" charset="-122"/>
+                <a:latin typeface="微软雅黑"/>
               </a:rPr>
-              <a:t>FA-</a:t>
-            </a:r>
-            <a:r>
-              <a:rPr sz="2400" b="1" dirty="0" err="1">
-                <a:solidFill>
-                  <a:srgbClr val="203A5C"/>
-                </a:solidFill>
-                <a:latin typeface="微软雅黑" panose="020B0503020204020204" pitchFamily="34" charset="-122"/>
-                <a:ea typeface="微软雅黑" panose="020B0503020204020204" pitchFamily="34" charset="-122"/>
-              </a:rPr>
-              <a:t>BiLSTM</a:t>
-            </a:r>
-            <a:r>
-              <a:rPr sz="2400" b="1" dirty="0">
-                <a:solidFill>
-                  <a:srgbClr val="203A5C"/>
-                </a:solidFill>
-                <a:latin typeface="微软雅黑" panose="020B0503020204020204" pitchFamily="34" charset="-122"/>
-                <a:ea typeface="微软雅黑" panose="020B0503020204020204" pitchFamily="34" charset="-122"/>
-              </a:rPr>
-              <a:t> </a:t>
-            </a:r>
-            <a:r>
-              <a:rPr sz="2400" b="1" dirty="0" err="1">
-                <a:solidFill>
-                  <a:srgbClr val="203A5C"/>
-                </a:solidFill>
-                <a:latin typeface="微软雅黑" panose="020B0503020204020204" pitchFamily="34" charset="-122"/>
-                <a:ea typeface="微软雅黑" panose="020B0503020204020204" pitchFamily="34" charset="-122"/>
-              </a:rPr>
-              <a:t>测井智能识别</a:t>
-            </a:r>
-            <a:r>
-              <a:rPr lang="zh-CN" altLang="en-US" sz="2400" b="1" dirty="0">
-                <a:solidFill>
-                  <a:srgbClr val="203A5C"/>
-                </a:solidFill>
-                <a:latin typeface="微软雅黑" panose="020B0503020204020204" pitchFamily="34" charset="-122"/>
-                <a:ea typeface="微软雅黑" panose="020B0503020204020204" pitchFamily="34" charset="-122"/>
-              </a:rPr>
-              <a:t>网络结构图</a:t>
-            </a:r>
-            <a:endParaRPr sz="2400" b="1" dirty="0">
-              <a:solidFill>
-                <a:srgbClr val="203A5C"/>
-              </a:solidFill>
-              <a:latin typeface="微软雅黑" panose="020B0503020204020204" pitchFamily="34" charset="-122"/>
-              <a:ea typeface="微软雅黑" panose="020B0503020204020204" pitchFamily="34" charset="-122"/>
-            </a:endParaRPr>
+              <a:t>FA-BiLSTM 测井智能识别架构图</a:t>
+            </a:r>
           </a:p>
         </p:txBody>
       </p:sp>
@@ -3223,7 +3173,6 @@
           <a:lstStyle/>
           <a:p>
             <a:pPr algn="ctr"/>
-            <a:endParaRPr/>
           </a:p>
         </p:txBody>
       </p:sp>
@@ -3274,9 +3223,7 @@
             <a:ext cx="5580000" cy="5580000"/>
           </a:xfrm>
           <a:prstGeom prst="roundRect">
-            <a:avLst>
-              <a:gd name="adj" fmla="val 9970"/>
-            </a:avLst>
+            <a:avLst/>
           </a:prstGeom>
           <a:solidFill>
             <a:srgbClr val="ECF2F9"/>
@@ -3306,7 +3253,6 @@
           <a:lstStyle/>
           <a:p>
             <a:pPr algn="ctr"/>
-            <a:endParaRPr/>
           </a:p>
         </p:txBody>
       </p:sp>
@@ -3387,7 +3333,6 @@
           <a:lstStyle/>
           <a:p>
             <a:pPr algn="ctr"/>
-            <a:endParaRPr/>
           </a:p>
         </p:txBody>
       </p:sp>
@@ -3399,8 +3344,8 @@
         </p:nvSpPr>
         <p:spPr>
           <a:xfrm>
-            <a:off x="9000000" y="911074"/>
-            <a:ext cx="2808000" cy="584775"/>
+            <a:off x="9000000" y="900000"/>
+            <a:ext cx="2808000" cy="432000"/>
           </a:xfrm>
           <a:prstGeom prst="rect">
             <a:avLst/>
@@ -3415,31 +3360,13 @@
           <a:p>
             <a:pPr algn="ctr"/>
             <a:r>
-              <a:rPr sz="1600" b="1" dirty="0">
+              <a:rPr sz="1600" b="1">
                 <a:solidFill>
                   <a:srgbClr val="203A5C"/>
                 </a:solidFill>
                 <a:latin typeface="微软雅黑"/>
               </a:rPr>
-              <a:t>3. </a:t>
-            </a:r>
-            <a:r>
-              <a:rPr sz="1600" b="1" dirty="0" err="1">
-                <a:solidFill>
-                  <a:srgbClr val="203A5C"/>
-                </a:solidFill>
-                <a:latin typeface="微软雅黑"/>
-              </a:rPr>
-              <a:t>预测输出</a:t>
-            </a:r>
-            <a:r>
-              <a:rPr sz="1600" b="1" dirty="0">
-                <a:solidFill>
-                  <a:srgbClr val="203A5C"/>
-                </a:solidFill>
-                <a:latin typeface="微软雅黑"/>
-              </a:rPr>
-              <a:t> (Prediction Output)</a:t>
+              <a:t>3. 预测输出 (Prediction Output)</a:t>
             </a:r>
           </a:p>
         </p:txBody>
@@ -3587,7 +3514,7 @@
           </a:fontRef>
         </p:style>
         <p:txBody>
-          <a:bodyPr wrap="square" rtlCol="0" anchor="ctr"/>
+          <a:bodyPr rtlCol="0" anchor="ctr" wrap="square"/>
           <a:lstStyle/>
           <a:p>
             <a:pPr algn="ctr"/>
@@ -3641,7 +3568,7 @@
           </a:fontRef>
         </p:style>
         <p:txBody>
-          <a:bodyPr wrap="square" rtlCol="0" anchor="ctr"/>
+          <a:bodyPr rtlCol="0" anchor="ctr" wrap="square"/>
           <a:lstStyle/>
           <a:p>
             <a:pPr algn="ctr"/>
@@ -3695,7 +3622,7 @@
           </a:fontRef>
         </p:style>
         <p:txBody>
-          <a:bodyPr wrap="square" rtlCol="0" anchor="ctr"/>
+          <a:bodyPr rtlCol="0" anchor="ctr" wrap="square"/>
           <a:lstStyle/>
           <a:p>
             <a:pPr algn="ctr"/>
@@ -3753,7 +3680,6 @@
           <a:lstStyle/>
           <a:p>
             <a:pPr algn="ctr"/>
-            <a:endParaRPr/>
           </a:p>
         </p:txBody>
       </p:sp>
@@ -3838,7 +3764,7 @@
         <p:spPr>
           <a:xfrm>
             <a:off x="3420000" y="1440000"/>
-            <a:ext cx="5220000" cy="1980000"/>
+            <a:ext cx="5220000" cy="2088000"/>
           </a:xfrm>
           <a:prstGeom prst="roundRect">
             <a:avLst/>
@@ -3871,7 +3797,6 @@
           <a:lstStyle/>
           <a:p>
             <a:pPr algn="ctr"/>
-            <a:endParaRPr/>
           </a:p>
         </p:txBody>
       </p:sp>
@@ -3884,7 +3809,7 @@
         <p:spPr>
           <a:xfrm>
             <a:off x="3420000" y="1440000"/>
-            <a:ext cx="5220000" cy="360000"/>
+            <a:ext cx="5220000" cy="288000"/>
           </a:xfrm>
           <a:prstGeom prst="rect">
             <a:avLst/>
@@ -3910,111 +3835,16 @@
           </a:p>
         </p:txBody>
       </p:sp>
-      <p:sp>
-        <p:nvSpPr>
-          <p:cNvPr id="20" name="Oval 19"/>
-          <p:cNvSpPr/>
-          <p:nvPr/>
-        </p:nvSpPr>
-        <p:spPr>
-          <a:xfrm>
-            <a:off x="3780000" y="1872000"/>
-            <a:ext cx="288000" cy="288000"/>
-          </a:xfrm>
-          <a:prstGeom prst="ellipse">
-            <a:avLst/>
-          </a:prstGeom>
-          <a:solidFill>
-            <a:srgbClr val="91C78A"/>
-          </a:solidFill>
-          <a:ln>
-            <a:solidFill>
-              <a:srgbClr val="FFFFFF"/>
-            </a:solidFill>
-          </a:ln>
-        </p:spPr>
-        <p:style>
-          <a:lnRef idx="1">
-            <a:schemeClr val="accent1"/>
-          </a:lnRef>
-          <a:fillRef idx="3">
-            <a:schemeClr val="accent1"/>
-          </a:fillRef>
-          <a:effectRef idx="2">
-            <a:schemeClr val="accent1"/>
-          </a:effectRef>
-          <a:fontRef idx="minor">
-            <a:schemeClr val="lt1"/>
-          </a:fontRef>
-        </p:style>
-        <p:txBody>
-          <a:bodyPr rtlCol="0" anchor="ctr"/>
-          <a:lstStyle/>
-          <a:p>
-            <a:pPr algn="ctr"/>
-            <a:endParaRPr/>
-          </a:p>
-        </p:txBody>
-      </p:sp>
-      <p:sp>
-        <p:nvSpPr>
-          <p:cNvPr id="21" name="Oval 20"/>
-          <p:cNvSpPr/>
-          <p:nvPr/>
-        </p:nvSpPr>
-        <p:spPr>
-          <a:xfrm>
-            <a:off x="3780000" y="2412000"/>
-            <a:ext cx="288000" cy="288000"/>
-          </a:xfrm>
-          <a:prstGeom prst="ellipse">
-            <a:avLst/>
-          </a:prstGeom>
-          <a:solidFill>
-            <a:srgbClr val="7AAAD6"/>
-          </a:solidFill>
-          <a:ln>
-            <a:solidFill>
-              <a:srgbClr val="FFFFFF"/>
-            </a:solidFill>
-          </a:ln>
-        </p:spPr>
-        <p:style>
-          <a:lnRef idx="1">
-            <a:schemeClr val="accent1"/>
-          </a:lnRef>
-          <a:fillRef idx="3">
-            <a:schemeClr val="accent1"/>
-          </a:fillRef>
-          <a:effectRef idx="2">
-            <a:schemeClr val="accent1"/>
-          </a:effectRef>
-          <a:fontRef idx="minor">
-            <a:schemeClr val="lt1"/>
-          </a:fontRef>
-        </p:style>
-        <p:txBody>
-          <a:bodyPr rtlCol="0" anchor="ctr"/>
-          <a:lstStyle/>
-          <a:p>
-            <a:pPr algn="ctr"/>
-            <a:endParaRPr/>
-          </a:p>
-        </p:txBody>
-      </p:sp>
       <p:cxnSp>
         <p:nvCxnSpPr>
-          <p:cNvPr id="23" name="Connector 22"/>
-          <p:cNvCxnSpPr>
-            <a:cxnSpLocks/>
-            <a:stCxn id="21" idx="0"/>
-          </p:cNvCxnSpPr>
+          <p:cNvPr id="20" name="Connector 19"/>
+          <p:cNvCxnSpPr/>
           <p:nvPr/>
         </p:nvCxnSpPr>
         <p:spPr>
           <a:xfrm flipV="1">
-            <a:off x="3924000" y="2160000"/>
-            <a:ext cx="0" cy="252000"/>
+            <a:off x="4248000" y="2790000"/>
+            <a:ext cx="0" cy="54000"/>
           </a:xfrm>
           <a:prstGeom prst="line">
             <a:avLst/>
@@ -4040,111 +3870,16 @@
           </a:fontRef>
         </p:style>
       </p:cxnSp>
-      <p:sp>
-        <p:nvSpPr>
-          <p:cNvPr id="24" name="Oval 23"/>
-          <p:cNvSpPr/>
-          <p:nvPr/>
-        </p:nvSpPr>
-        <p:spPr>
-          <a:xfrm>
-            <a:off x="4572000" y="1872000"/>
-            <a:ext cx="288000" cy="288000"/>
-          </a:xfrm>
-          <a:prstGeom prst="ellipse">
-            <a:avLst/>
-          </a:prstGeom>
-          <a:solidFill>
-            <a:srgbClr val="91C78A"/>
-          </a:solidFill>
-          <a:ln>
-            <a:solidFill>
-              <a:srgbClr val="FFFFFF"/>
-            </a:solidFill>
-          </a:ln>
-        </p:spPr>
-        <p:style>
-          <a:lnRef idx="1">
-            <a:schemeClr val="accent1"/>
-          </a:lnRef>
-          <a:fillRef idx="3">
-            <a:schemeClr val="accent1"/>
-          </a:fillRef>
-          <a:effectRef idx="2">
-            <a:schemeClr val="accent1"/>
-          </a:effectRef>
-          <a:fontRef idx="minor">
-            <a:schemeClr val="lt1"/>
-          </a:fontRef>
-        </p:style>
-        <p:txBody>
-          <a:bodyPr rtlCol="0" anchor="ctr"/>
-          <a:lstStyle/>
-          <a:p>
-            <a:pPr algn="ctr"/>
-            <a:endParaRPr/>
-          </a:p>
-        </p:txBody>
-      </p:sp>
-      <p:sp>
-        <p:nvSpPr>
-          <p:cNvPr id="25" name="Oval 24"/>
-          <p:cNvSpPr/>
-          <p:nvPr/>
-        </p:nvSpPr>
-        <p:spPr>
-          <a:xfrm>
-            <a:off x="4572000" y="2412000"/>
-            <a:ext cx="288000" cy="288000"/>
-          </a:xfrm>
-          <a:prstGeom prst="ellipse">
-            <a:avLst/>
-          </a:prstGeom>
-          <a:solidFill>
-            <a:srgbClr val="7AAAD6"/>
-          </a:solidFill>
-          <a:ln>
-            <a:solidFill>
-              <a:srgbClr val="FFFFFF"/>
-            </a:solidFill>
-          </a:ln>
-        </p:spPr>
-        <p:style>
-          <a:lnRef idx="1">
-            <a:schemeClr val="accent1"/>
-          </a:lnRef>
-          <a:fillRef idx="3">
-            <a:schemeClr val="accent1"/>
-          </a:fillRef>
-          <a:effectRef idx="2">
-            <a:schemeClr val="accent1"/>
-          </a:effectRef>
-          <a:fontRef idx="minor">
-            <a:schemeClr val="lt1"/>
-          </a:fontRef>
-        </p:style>
-        <p:txBody>
-          <a:bodyPr rtlCol="0" anchor="ctr"/>
-          <a:lstStyle/>
-          <a:p>
-            <a:pPr algn="ctr"/>
-            <a:endParaRPr/>
-          </a:p>
-        </p:txBody>
-      </p:sp>
       <p:cxnSp>
         <p:nvCxnSpPr>
-          <p:cNvPr id="27" name="Connector 26"/>
-          <p:cNvCxnSpPr>
-            <a:cxnSpLocks/>
-            <a:stCxn id="25" idx="0"/>
-          </p:cNvCxnSpPr>
+          <p:cNvPr id="21" name="Connector 20"/>
+          <p:cNvCxnSpPr/>
           <p:nvPr/>
         </p:nvCxnSpPr>
         <p:spPr>
           <a:xfrm flipV="1">
-            <a:off x="4716000" y="2160000"/>
-            <a:ext cx="0" cy="252000"/>
+            <a:off x="4356000" y="2664000"/>
+            <a:ext cx="216000" cy="216000"/>
           </a:xfrm>
           <a:prstGeom prst="line">
             <a:avLst/>
@@ -4170,111 +3905,16 @@
           </a:fontRef>
         </p:style>
       </p:cxnSp>
-      <p:sp>
-        <p:nvSpPr>
-          <p:cNvPr id="28" name="Oval 27"/>
-          <p:cNvSpPr/>
-          <p:nvPr/>
-        </p:nvSpPr>
-        <p:spPr>
-          <a:xfrm>
-            <a:off x="5364000" y="1872000"/>
-            <a:ext cx="288000" cy="288000"/>
-          </a:xfrm>
-          <a:prstGeom prst="ellipse">
-            <a:avLst/>
-          </a:prstGeom>
-          <a:solidFill>
-            <a:srgbClr val="91C78A"/>
-          </a:solidFill>
-          <a:ln>
-            <a:solidFill>
-              <a:srgbClr val="FFFFFF"/>
-            </a:solidFill>
-          </a:ln>
-        </p:spPr>
-        <p:style>
-          <a:lnRef idx="1">
-            <a:schemeClr val="accent1"/>
-          </a:lnRef>
-          <a:fillRef idx="3">
-            <a:schemeClr val="accent1"/>
-          </a:fillRef>
-          <a:effectRef idx="2">
-            <a:schemeClr val="accent1"/>
-          </a:effectRef>
-          <a:fontRef idx="minor">
-            <a:schemeClr val="lt1"/>
-          </a:fontRef>
-        </p:style>
-        <p:txBody>
-          <a:bodyPr rtlCol="0" anchor="ctr"/>
-          <a:lstStyle/>
-          <a:p>
-            <a:pPr algn="ctr"/>
-            <a:endParaRPr/>
-          </a:p>
-        </p:txBody>
-      </p:sp>
-      <p:sp>
-        <p:nvSpPr>
-          <p:cNvPr id="29" name="Oval 28"/>
-          <p:cNvSpPr/>
-          <p:nvPr/>
-        </p:nvSpPr>
-        <p:spPr>
-          <a:xfrm>
-            <a:off x="5364000" y="2412000"/>
-            <a:ext cx="288000" cy="288000"/>
-          </a:xfrm>
-          <a:prstGeom prst="ellipse">
-            <a:avLst/>
-          </a:prstGeom>
-          <a:solidFill>
-            <a:srgbClr val="7AAAD6"/>
-          </a:solidFill>
-          <a:ln>
-            <a:solidFill>
-              <a:srgbClr val="FFFFFF"/>
-            </a:solidFill>
-          </a:ln>
-        </p:spPr>
-        <p:style>
-          <a:lnRef idx="1">
-            <a:schemeClr val="accent1"/>
-          </a:lnRef>
-          <a:fillRef idx="3">
-            <a:schemeClr val="accent1"/>
-          </a:fillRef>
-          <a:effectRef idx="2">
-            <a:schemeClr val="accent1"/>
-          </a:effectRef>
-          <a:fontRef idx="minor">
-            <a:schemeClr val="lt1"/>
-          </a:fontRef>
-        </p:style>
-        <p:txBody>
-          <a:bodyPr rtlCol="0" anchor="ctr"/>
-          <a:lstStyle/>
-          <a:p>
-            <a:pPr algn="ctr"/>
-            <a:endParaRPr/>
-          </a:p>
-        </p:txBody>
-      </p:sp>
       <p:cxnSp>
         <p:nvCxnSpPr>
-          <p:cNvPr id="31" name="Connector 30"/>
-          <p:cNvCxnSpPr>
-            <a:cxnSpLocks/>
-            <a:stCxn id="29" idx="0"/>
-          </p:cNvCxnSpPr>
+          <p:cNvPr id="22" name="Connector 21"/>
+          <p:cNvCxnSpPr/>
           <p:nvPr/>
         </p:nvCxnSpPr>
         <p:spPr>
-          <a:xfrm flipV="1">
-            <a:off x="5508000" y="2160000"/>
-            <a:ext cx="0" cy="252000"/>
+          <a:xfrm flipH="1" flipV="1">
+            <a:off x="4356000" y="2430000"/>
+            <a:ext cx="216000" cy="234000"/>
           </a:xfrm>
           <a:prstGeom prst="line">
             <a:avLst/>
@@ -4300,111 +3940,436 @@
           </a:fontRef>
         </p:style>
       </p:cxnSp>
-      <p:sp>
-        <p:nvSpPr>
-          <p:cNvPr id="32" name="Oval 31"/>
-          <p:cNvSpPr/>
-          <p:nvPr/>
-        </p:nvSpPr>
-        <p:spPr>
-          <a:xfrm>
-            <a:off x="6156000" y="1872000"/>
-            <a:ext cx="288000" cy="288000"/>
-          </a:xfrm>
-          <a:prstGeom prst="ellipse">
-            <a:avLst/>
-          </a:prstGeom>
-          <a:solidFill>
-            <a:srgbClr val="91C78A"/>
-          </a:solidFill>
-          <a:ln>
+      <p:cxnSp>
+        <p:nvCxnSpPr>
+          <p:cNvPr id="23" name="Connector 22"/>
+          <p:cNvCxnSpPr/>
+          <p:nvPr/>
+        </p:nvCxnSpPr>
+        <p:spPr>
+          <a:xfrm flipH="1" flipV="1">
+            <a:off x="3924000" y="2304000"/>
+            <a:ext cx="216000" cy="234000"/>
+          </a:xfrm>
+          <a:prstGeom prst="line">
+            <a:avLst/>
+          </a:prstGeom>
+          <a:ln w="19050">
             <a:solidFill>
-              <a:srgbClr val="FFFFFF"/>
+              <a:srgbClr val="646464"/>
             </a:solidFill>
           </a:ln>
         </p:spPr>
         <p:style>
-          <a:lnRef idx="1">
+          <a:lnRef idx="2">
             <a:schemeClr val="accent1"/>
           </a:lnRef>
-          <a:fillRef idx="3">
+          <a:fillRef idx="0">
             <a:schemeClr val="accent1"/>
           </a:fillRef>
-          <a:effectRef idx="2">
+          <a:effectRef idx="1">
             <a:schemeClr val="accent1"/>
           </a:effectRef>
           <a:fontRef idx="minor">
-            <a:schemeClr val="lt1"/>
+            <a:schemeClr val="tx1"/>
           </a:fontRef>
         </p:style>
-        <p:txBody>
-          <a:bodyPr rtlCol="0" anchor="ctr"/>
-          <a:lstStyle/>
-          <a:p>
-            <a:pPr algn="ctr"/>
-            <a:endParaRPr/>
-          </a:p>
-        </p:txBody>
-      </p:sp>
-      <p:sp>
-        <p:nvSpPr>
-          <p:cNvPr id="33" name="Oval 32"/>
-          <p:cNvSpPr/>
-          <p:nvPr/>
-        </p:nvSpPr>
-        <p:spPr>
-          <a:xfrm>
-            <a:off x="6156000" y="2412000"/>
-            <a:ext cx="288000" cy="288000"/>
-          </a:xfrm>
-          <a:prstGeom prst="ellipse">
-            <a:avLst/>
-          </a:prstGeom>
-          <a:solidFill>
-            <a:srgbClr val="7AAAD6"/>
-          </a:solidFill>
-          <a:ln>
+      </p:cxnSp>
+      <p:cxnSp>
+        <p:nvCxnSpPr>
+          <p:cNvPr id="24" name="Connector 23"/>
+          <p:cNvCxnSpPr/>
+          <p:nvPr/>
+        </p:nvCxnSpPr>
+        <p:spPr>
+          <a:xfrm flipV="1">
+            <a:off x="3924000" y="2088000"/>
+            <a:ext cx="216000" cy="216000"/>
+          </a:xfrm>
+          <a:prstGeom prst="line">
+            <a:avLst/>
+          </a:prstGeom>
+          <a:ln w="19050">
             <a:solidFill>
-              <a:srgbClr val="FFFFFF"/>
+              <a:srgbClr val="646464"/>
             </a:solidFill>
           </a:ln>
         </p:spPr>
         <p:style>
-          <a:lnRef idx="1">
+          <a:lnRef idx="2">
             <a:schemeClr val="accent1"/>
           </a:lnRef>
-          <a:fillRef idx="3">
+          <a:fillRef idx="0">
             <a:schemeClr val="accent1"/>
           </a:fillRef>
-          <a:effectRef idx="2">
+          <a:effectRef idx="1">
             <a:schemeClr val="accent1"/>
           </a:effectRef>
           <a:fontRef idx="minor">
-            <a:schemeClr val="lt1"/>
+            <a:schemeClr val="tx1"/>
           </a:fontRef>
         </p:style>
-        <p:txBody>
-          <a:bodyPr rtlCol="0" anchor="ctr"/>
-          <a:lstStyle/>
-          <a:p>
-            <a:pPr algn="ctr"/>
-            <a:endParaRPr/>
-          </a:p>
-        </p:txBody>
-      </p:sp>
+      </p:cxnSp>
+      <p:cxnSp>
+        <p:nvCxnSpPr>
+          <p:cNvPr id="25" name="Connector 24"/>
+          <p:cNvCxnSpPr/>
+          <p:nvPr/>
+        </p:nvCxnSpPr>
+        <p:spPr>
+          <a:xfrm flipV="1">
+            <a:off x="4248000" y="2088000"/>
+            <a:ext cx="0" cy="90000"/>
+          </a:xfrm>
+          <a:prstGeom prst="line">
+            <a:avLst/>
+          </a:prstGeom>
+          <a:ln w="19050">
+            <a:solidFill>
+              <a:srgbClr val="646464"/>
+            </a:solidFill>
+          </a:ln>
+        </p:spPr>
+        <p:style>
+          <a:lnRef idx="2">
+            <a:schemeClr val="accent1"/>
+          </a:lnRef>
+          <a:fillRef idx="0">
+            <a:schemeClr val="accent1"/>
+          </a:fillRef>
+          <a:effectRef idx="1">
+            <a:schemeClr val="accent1"/>
+          </a:effectRef>
+          <a:fontRef idx="minor">
+            <a:schemeClr val="tx1"/>
+          </a:fontRef>
+        </p:style>
+      </p:cxnSp>
+      <p:cxnSp>
+        <p:nvCxnSpPr>
+          <p:cNvPr id="26" name="Connector 25"/>
+          <p:cNvCxnSpPr/>
+          <p:nvPr/>
+        </p:nvCxnSpPr>
+        <p:spPr>
+          <a:xfrm>
+            <a:off x="4248000" y="1800000"/>
+            <a:ext cx="0" cy="72000"/>
+          </a:xfrm>
+          <a:prstGeom prst="line">
+            <a:avLst/>
+          </a:prstGeom>
+          <a:ln w="19050">
+            <a:solidFill>
+              <a:srgbClr val="646464"/>
+            </a:solidFill>
+          </a:ln>
+        </p:spPr>
+        <p:style>
+          <a:lnRef idx="2">
+            <a:schemeClr val="accent1"/>
+          </a:lnRef>
+          <a:fillRef idx="0">
+            <a:schemeClr val="accent1"/>
+          </a:fillRef>
+          <a:effectRef idx="1">
+            <a:schemeClr val="accent1"/>
+          </a:effectRef>
+          <a:fontRef idx="minor">
+            <a:schemeClr val="tx1"/>
+          </a:fontRef>
+        </p:style>
+      </p:cxnSp>
+      <p:cxnSp>
+        <p:nvCxnSpPr>
+          <p:cNvPr id="27" name="Connector 26"/>
+          <p:cNvCxnSpPr/>
+          <p:nvPr/>
+        </p:nvCxnSpPr>
+        <p:spPr>
+          <a:xfrm flipV="1">
+            <a:off x="5940000" y="2790000"/>
+            <a:ext cx="0" cy="54000"/>
+          </a:xfrm>
+          <a:prstGeom prst="line">
+            <a:avLst/>
+          </a:prstGeom>
+          <a:ln w="19050">
+            <a:solidFill>
+              <a:srgbClr val="646464"/>
+            </a:solidFill>
+          </a:ln>
+        </p:spPr>
+        <p:style>
+          <a:lnRef idx="2">
+            <a:schemeClr val="accent1"/>
+          </a:lnRef>
+          <a:fillRef idx="0">
+            <a:schemeClr val="accent1"/>
+          </a:fillRef>
+          <a:effectRef idx="1">
+            <a:schemeClr val="accent1"/>
+          </a:effectRef>
+          <a:fontRef idx="minor">
+            <a:schemeClr val="tx1"/>
+          </a:fontRef>
+        </p:style>
+      </p:cxnSp>
+      <p:cxnSp>
+        <p:nvCxnSpPr>
+          <p:cNvPr id="28" name="Connector 27"/>
+          <p:cNvCxnSpPr/>
+          <p:nvPr/>
+        </p:nvCxnSpPr>
+        <p:spPr>
+          <a:xfrm flipV="1">
+            <a:off x="6048000" y="2664000"/>
+            <a:ext cx="215999" cy="216000"/>
+          </a:xfrm>
+          <a:prstGeom prst="line">
+            <a:avLst/>
+          </a:prstGeom>
+          <a:ln w="19050">
+            <a:solidFill>
+              <a:srgbClr val="646464"/>
+            </a:solidFill>
+          </a:ln>
+        </p:spPr>
+        <p:style>
+          <a:lnRef idx="2">
+            <a:schemeClr val="accent1"/>
+          </a:lnRef>
+          <a:fillRef idx="0">
+            <a:schemeClr val="accent1"/>
+          </a:fillRef>
+          <a:effectRef idx="1">
+            <a:schemeClr val="accent1"/>
+          </a:effectRef>
+          <a:fontRef idx="minor">
+            <a:schemeClr val="tx1"/>
+          </a:fontRef>
+        </p:style>
+      </p:cxnSp>
+      <p:cxnSp>
+        <p:nvCxnSpPr>
+          <p:cNvPr id="29" name="Connector 28"/>
+          <p:cNvCxnSpPr/>
+          <p:nvPr/>
+        </p:nvCxnSpPr>
+        <p:spPr>
+          <a:xfrm flipH="1" flipV="1">
+            <a:off x="6048000" y="2430000"/>
+            <a:ext cx="215999" cy="234000"/>
+          </a:xfrm>
+          <a:prstGeom prst="line">
+            <a:avLst/>
+          </a:prstGeom>
+          <a:ln w="19050">
+            <a:solidFill>
+              <a:srgbClr val="646464"/>
+            </a:solidFill>
+          </a:ln>
+        </p:spPr>
+        <p:style>
+          <a:lnRef idx="2">
+            <a:schemeClr val="accent1"/>
+          </a:lnRef>
+          <a:fillRef idx="0">
+            <a:schemeClr val="accent1"/>
+          </a:fillRef>
+          <a:effectRef idx="1">
+            <a:schemeClr val="accent1"/>
+          </a:effectRef>
+          <a:fontRef idx="minor">
+            <a:schemeClr val="tx1"/>
+          </a:fontRef>
+        </p:style>
+      </p:cxnSp>
+      <p:cxnSp>
+        <p:nvCxnSpPr>
+          <p:cNvPr id="30" name="Connector 29"/>
+          <p:cNvCxnSpPr/>
+          <p:nvPr/>
+        </p:nvCxnSpPr>
+        <p:spPr>
+          <a:xfrm flipH="1" flipV="1">
+            <a:off x="5616000" y="2304000"/>
+            <a:ext cx="216000" cy="234000"/>
+          </a:xfrm>
+          <a:prstGeom prst="line">
+            <a:avLst/>
+          </a:prstGeom>
+          <a:ln w="19050">
+            <a:solidFill>
+              <a:srgbClr val="646464"/>
+            </a:solidFill>
+          </a:ln>
+        </p:spPr>
+        <p:style>
+          <a:lnRef idx="2">
+            <a:schemeClr val="accent1"/>
+          </a:lnRef>
+          <a:fillRef idx="0">
+            <a:schemeClr val="accent1"/>
+          </a:fillRef>
+          <a:effectRef idx="1">
+            <a:schemeClr val="accent1"/>
+          </a:effectRef>
+          <a:fontRef idx="minor">
+            <a:schemeClr val="tx1"/>
+          </a:fontRef>
+        </p:style>
+      </p:cxnSp>
+      <p:cxnSp>
+        <p:nvCxnSpPr>
+          <p:cNvPr id="31" name="Connector 30"/>
+          <p:cNvCxnSpPr/>
+          <p:nvPr/>
+        </p:nvCxnSpPr>
+        <p:spPr>
+          <a:xfrm flipV="1">
+            <a:off x="5616000" y="2088000"/>
+            <a:ext cx="216000" cy="216000"/>
+          </a:xfrm>
+          <a:prstGeom prst="line">
+            <a:avLst/>
+          </a:prstGeom>
+          <a:ln w="19050">
+            <a:solidFill>
+              <a:srgbClr val="646464"/>
+            </a:solidFill>
+          </a:ln>
+        </p:spPr>
+        <p:style>
+          <a:lnRef idx="2">
+            <a:schemeClr val="accent1"/>
+          </a:lnRef>
+          <a:fillRef idx="0">
+            <a:schemeClr val="accent1"/>
+          </a:fillRef>
+          <a:effectRef idx="1">
+            <a:schemeClr val="accent1"/>
+          </a:effectRef>
+          <a:fontRef idx="minor">
+            <a:schemeClr val="tx1"/>
+          </a:fontRef>
+        </p:style>
+      </p:cxnSp>
+      <p:cxnSp>
+        <p:nvCxnSpPr>
+          <p:cNvPr id="32" name="Connector 31"/>
+          <p:cNvCxnSpPr/>
+          <p:nvPr/>
+        </p:nvCxnSpPr>
+        <p:spPr>
+          <a:xfrm flipV="1">
+            <a:off x="5940000" y="2088000"/>
+            <a:ext cx="0" cy="90000"/>
+          </a:xfrm>
+          <a:prstGeom prst="line">
+            <a:avLst/>
+          </a:prstGeom>
+          <a:ln w="19050">
+            <a:solidFill>
+              <a:srgbClr val="646464"/>
+            </a:solidFill>
+          </a:ln>
+        </p:spPr>
+        <p:style>
+          <a:lnRef idx="2">
+            <a:schemeClr val="accent1"/>
+          </a:lnRef>
+          <a:fillRef idx="0">
+            <a:schemeClr val="accent1"/>
+          </a:fillRef>
+          <a:effectRef idx="1">
+            <a:schemeClr val="accent1"/>
+          </a:effectRef>
+          <a:fontRef idx="minor">
+            <a:schemeClr val="tx1"/>
+          </a:fontRef>
+        </p:style>
+      </p:cxnSp>
+      <p:cxnSp>
+        <p:nvCxnSpPr>
+          <p:cNvPr id="33" name="Connector 32"/>
+          <p:cNvCxnSpPr/>
+          <p:nvPr/>
+        </p:nvCxnSpPr>
+        <p:spPr>
+          <a:xfrm>
+            <a:off x="5940000" y="1800000"/>
+            <a:ext cx="0" cy="72000"/>
+          </a:xfrm>
+          <a:prstGeom prst="line">
+            <a:avLst/>
+          </a:prstGeom>
+          <a:ln w="19050">
+            <a:solidFill>
+              <a:srgbClr val="646464"/>
+            </a:solidFill>
+          </a:ln>
+        </p:spPr>
+        <p:style>
+          <a:lnRef idx="2">
+            <a:schemeClr val="accent1"/>
+          </a:lnRef>
+          <a:fillRef idx="0">
+            <a:schemeClr val="accent1"/>
+          </a:fillRef>
+          <a:effectRef idx="1">
+            <a:schemeClr val="accent1"/>
+          </a:effectRef>
+          <a:fontRef idx="minor">
+            <a:schemeClr val="tx1"/>
+          </a:fontRef>
+        </p:style>
+      </p:cxnSp>
+      <p:cxnSp>
+        <p:nvCxnSpPr>
+          <p:cNvPr id="34" name="Connector 33"/>
+          <p:cNvCxnSpPr/>
+          <p:nvPr/>
+        </p:nvCxnSpPr>
+        <p:spPr>
+          <a:xfrm flipV="1">
+            <a:off x="7632000" y="2790000"/>
+            <a:ext cx="0" cy="54000"/>
+          </a:xfrm>
+          <a:prstGeom prst="line">
+            <a:avLst/>
+          </a:prstGeom>
+          <a:ln w="19050">
+            <a:solidFill>
+              <a:srgbClr val="646464"/>
+            </a:solidFill>
+          </a:ln>
+        </p:spPr>
+        <p:style>
+          <a:lnRef idx="2">
+            <a:schemeClr val="accent1"/>
+          </a:lnRef>
+          <a:fillRef idx="0">
+            <a:schemeClr val="accent1"/>
+          </a:fillRef>
+          <a:effectRef idx="1">
+            <a:schemeClr val="accent1"/>
+          </a:effectRef>
+          <a:fontRef idx="minor">
+            <a:schemeClr val="tx1"/>
+          </a:fontRef>
+        </p:style>
+      </p:cxnSp>
       <p:cxnSp>
         <p:nvCxnSpPr>
           <p:cNvPr id="35" name="Connector 34"/>
-          <p:cNvCxnSpPr>
-            <a:cxnSpLocks/>
-            <a:stCxn id="33" idx="0"/>
-          </p:cNvCxnSpPr>
+          <p:cNvCxnSpPr/>
           <p:nvPr/>
         </p:nvCxnSpPr>
         <p:spPr>
           <a:xfrm flipV="1">
-            <a:off x="6300000" y="2160000"/>
-            <a:ext cx="0" cy="252000"/>
+            <a:off x="7740000" y="2664000"/>
+            <a:ext cx="215999" cy="216000"/>
           </a:xfrm>
           <a:prstGeom prst="line">
             <a:avLst/>
@@ -4437,16 +4402,16 @@
           <p:nvPr/>
         </p:nvCxnSpPr>
         <p:spPr>
-          <a:xfrm>
-            <a:off x="4068000" y="2016000"/>
-            <a:ext cx="504000" cy="0"/>
+          <a:xfrm flipH="1" flipV="1">
+            <a:off x="7740000" y="2430000"/>
+            <a:ext cx="215999" cy="234000"/>
           </a:xfrm>
           <a:prstGeom prst="line">
             <a:avLst/>
           </a:prstGeom>
           <a:ln w="19050">
             <a:solidFill>
-              <a:srgbClr val="91C78A"/>
+              <a:srgbClr val="646464"/>
             </a:solidFill>
           </a:ln>
         </p:spPr>
@@ -4472,16 +4437,16 @@
           <p:nvPr/>
         </p:nvCxnSpPr>
         <p:spPr>
-          <a:xfrm flipH="1">
-            <a:off x="4068000" y="2556000"/>
-            <a:ext cx="504000" cy="0"/>
+          <a:xfrm flipH="1" flipV="1">
+            <a:off x="7308000" y="2304000"/>
+            <a:ext cx="215999" cy="234000"/>
           </a:xfrm>
           <a:prstGeom prst="line">
             <a:avLst/>
           </a:prstGeom>
           <a:ln w="19050">
             <a:solidFill>
-              <a:srgbClr val="7AAAD6"/>
+              <a:srgbClr val="646464"/>
             </a:solidFill>
           </a:ln>
         </p:spPr>
@@ -4507,16 +4472,16 @@
           <p:nvPr/>
         </p:nvCxnSpPr>
         <p:spPr>
-          <a:xfrm>
-            <a:off x="4860000" y="2016000"/>
-            <a:ext cx="504000" cy="0"/>
+          <a:xfrm flipV="1">
+            <a:off x="7308000" y="2088000"/>
+            <a:ext cx="215999" cy="216000"/>
           </a:xfrm>
           <a:prstGeom prst="line">
             <a:avLst/>
           </a:prstGeom>
           <a:ln w="19050">
             <a:solidFill>
-              <a:srgbClr val="91C78A"/>
+              <a:srgbClr val="646464"/>
             </a:solidFill>
           </a:ln>
         </p:spPr>
@@ -4542,16 +4507,16 @@
           <p:nvPr/>
         </p:nvCxnSpPr>
         <p:spPr>
-          <a:xfrm flipH="1">
-            <a:off x="4860000" y="2556000"/>
-            <a:ext cx="504000" cy="0"/>
+          <a:xfrm flipV="1">
+            <a:off x="7632000" y="2088000"/>
+            <a:ext cx="0" cy="90000"/>
           </a:xfrm>
           <a:prstGeom prst="line">
             <a:avLst/>
           </a:prstGeom>
           <a:ln w="19050">
             <a:solidFill>
-              <a:srgbClr val="7AAAD6"/>
+              <a:srgbClr val="646464"/>
             </a:solidFill>
           </a:ln>
         </p:spPr>
@@ -4578,15 +4543,15 @@
         </p:nvCxnSpPr>
         <p:spPr>
           <a:xfrm>
-            <a:off x="5652000" y="2016000"/>
-            <a:ext cx="504000" cy="0"/>
+            <a:off x="7632000" y="1800000"/>
+            <a:ext cx="0" cy="72000"/>
           </a:xfrm>
           <a:prstGeom prst="line">
             <a:avLst/>
           </a:prstGeom>
           <a:ln w="19050">
             <a:solidFill>
-              <a:srgbClr val="91C78A"/>
+              <a:srgbClr val="646464"/>
             </a:solidFill>
           </a:ln>
         </p:spPr>
@@ -4612,16 +4577,16 @@
           <p:nvPr/>
         </p:nvCxnSpPr>
         <p:spPr>
-          <a:xfrm flipH="1">
-            <a:off x="5652000" y="2556000"/>
-            <a:ext cx="504000" cy="0"/>
+          <a:xfrm>
+            <a:off x="4572000" y="2664000"/>
+            <a:ext cx="1044000" cy="0"/>
           </a:xfrm>
           <a:prstGeom prst="line">
             <a:avLst/>
           </a:prstGeom>
-          <a:ln w="19050">
+          <a:ln w="25400">
             <a:solidFill>
-              <a:srgbClr val="7AAAD6"/>
+              <a:srgbClr val="91C78A"/>
             </a:solidFill>
           </a:ln>
         </p:spPr>
@@ -4640,86 +4605,41 @@
           </a:fontRef>
         </p:style>
       </p:cxnSp>
-      <p:sp>
-        <p:nvSpPr>
-          <p:cNvPr id="42" name="TextBox 41"/>
-          <p:cNvSpPr txBox="1"/>
-          <p:nvPr/>
-        </p:nvSpPr>
-        <p:spPr>
-          <a:xfrm>
-            <a:off x="3575155" y="2857195"/>
-            <a:ext cx="3168000" cy="180000"/>
-          </a:xfrm>
-          <a:prstGeom prst="rect">
-            <a:avLst/>
-          </a:prstGeom>
-          <a:noFill/>
-        </p:spPr>
-        <p:txBody>
-          <a:bodyPr wrap="square" anchor="ctr">
-            <a:spAutoFit/>
-          </a:bodyPr>
-          <a:lstStyle/>
-          <a:p>
-            <a:pPr algn="ctr"/>
-            <a:r>
-              <a:rPr sz="1100" b="0" dirty="0" err="1">
-                <a:solidFill>
-                  <a:srgbClr val="000000"/>
-                </a:solidFill>
-                <a:latin typeface="微软雅黑"/>
-              </a:rPr>
-              <a:t>输入序列</a:t>
-            </a:r>
-            <a:r>
-              <a:rPr sz="1100" b="0" dirty="0">
-                <a:solidFill>
-                  <a:srgbClr val="000000"/>
-                </a:solidFill>
-                <a:latin typeface="微软雅黑"/>
-              </a:rPr>
-              <a:t> </a:t>
-            </a:r>
-            <a:r>
-              <a:rPr sz="1100" b="0" dirty="0" err="1">
-                <a:solidFill>
-                  <a:srgbClr val="000000"/>
-                </a:solidFill>
-                <a:latin typeface="微软雅黑"/>
-              </a:rPr>
-              <a:t>Xt</a:t>
-            </a:r>
-            <a:r>
-              <a:rPr sz="1100" b="0" dirty="0">
-                <a:solidFill>
-                  <a:srgbClr val="000000"/>
-                </a:solidFill>
-                <a:latin typeface="微软雅黑"/>
-              </a:rPr>
-              <a:t> = [x_((t-L)), ..., </a:t>
-            </a:r>
-            <a:r>
-              <a:rPr sz="1100" b="0" dirty="0" err="1">
-                <a:solidFill>
-                  <a:srgbClr val="000000"/>
-                </a:solidFill>
-                <a:latin typeface="微软雅黑"/>
-              </a:rPr>
-              <a:t>x_t</a:t>
-            </a:r>
-            <a:r>
-              <a:rPr sz="1100" b="0" dirty="0">
-                <a:solidFill>
-                  <a:srgbClr val="000000"/>
-                </a:solidFill>
-                <a:latin typeface="微软雅黑"/>
-              </a:rPr>
-              <a:t>]</a:t>
-            </a:r>
-          </a:p>
-        </p:txBody>
-      </p:sp>
+      <p:cxnSp>
+        <p:nvCxnSpPr>
+          <p:cNvPr id="42" name="Connector 41"/>
+          <p:cNvCxnSpPr/>
+          <p:nvPr/>
+        </p:nvCxnSpPr>
+        <p:spPr>
+          <a:xfrm>
+            <a:off x="6263999" y="2664000"/>
+            <a:ext cx="1044001" cy="0"/>
+          </a:xfrm>
+          <a:prstGeom prst="line">
+            <a:avLst/>
+          </a:prstGeom>
+          <a:ln w="25400">
+            <a:solidFill>
+              <a:srgbClr val="91C78A"/>
+            </a:solidFill>
+          </a:ln>
+        </p:spPr>
+        <p:style>
+          <a:lnRef idx="2">
+            <a:schemeClr val="accent1"/>
+          </a:lnRef>
+          <a:fillRef idx="0">
+            <a:schemeClr val="accent1"/>
+          </a:fillRef>
+          <a:effectRef idx="1">
+            <a:schemeClr val="accent1"/>
+          </a:effectRef>
+          <a:fontRef idx="minor">
+            <a:schemeClr val="tx1"/>
+          </a:fontRef>
+        </p:style>
+      </p:cxnSp>
       <p:cxnSp>
         <p:nvCxnSpPr>
           <p:cNvPr id="43" name="Connector 42"/>
@@ -4727,16 +4647,16 @@
           <p:nvPr/>
         </p:nvCxnSpPr>
         <p:spPr>
-          <a:xfrm>
-            <a:off x="6444000" y="2016000"/>
-            <a:ext cx="504000" cy="252000"/>
+          <a:xfrm flipH="1">
+            <a:off x="6263999" y="2304000"/>
+            <a:ext cx="1044001" cy="0"/>
           </a:xfrm>
           <a:prstGeom prst="line">
             <a:avLst/>
           </a:prstGeom>
-          <a:ln w="19050">
+          <a:ln w="25400">
             <a:solidFill>
-              <a:srgbClr val="646464"/>
+              <a:srgbClr val="E098A0"/>
             </a:solidFill>
           </a:ln>
         </p:spPr>
@@ -4762,16 +4682,16 @@
           <p:nvPr/>
         </p:nvCxnSpPr>
         <p:spPr>
-          <a:xfrm flipV="1">
-            <a:off x="6444000" y="2268000"/>
-            <a:ext cx="504000" cy="288000"/>
+          <a:xfrm flipH="1">
+            <a:off x="4572000" y="2304000"/>
+            <a:ext cx="1044000" cy="0"/>
           </a:xfrm>
           <a:prstGeom prst="line">
             <a:avLst/>
           </a:prstGeom>
-          <a:ln w="19050">
+          <a:ln w="25400">
             <a:solidFill>
-              <a:srgbClr val="646464"/>
+              <a:srgbClr val="E098A0"/>
             </a:solidFill>
           </a:ln>
         </p:spPr>
@@ -4792,14 +4712,1220 @@
       </p:cxnSp>
       <p:sp>
         <p:nvSpPr>
-          <p:cNvPr id="45" name="Rounded Rectangle 44"/>
+          <p:cNvPr id="45" name="TextBox 44"/>
+          <p:cNvSpPr txBox="1"/>
+          <p:nvPr/>
+        </p:nvSpPr>
+        <p:spPr>
+          <a:xfrm>
+            <a:off x="3456000" y="2880000"/>
+            <a:ext cx="648000" cy="288000"/>
+          </a:xfrm>
+          <a:prstGeom prst="rect">
+            <a:avLst/>
+          </a:prstGeom>
+          <a:noFill/>
+        </p:spPr>
+        <p:txBody>
+          <a:bodyPr wrap="square" anchor="ctr">
+            <a:spAutoFit/>
+          </a:bodyPr>
+          <a:lstStyle/>
+          <a:p>
+            <a:pPr algn="ctr"/>
+            <a:r>
+              <a:rPr sz="1000" b="1">
+                <a:solidFill>
+                  <a:srgbClr val="000000"/>
+                </a:solidFill>
+                <a:latin typeface="微软雅黑"/>
+              </a:rPr>
+              <a:t>输入层</a:t>
+            </a:r>
+          </a:p>
+        </p:txBody>
+      </p:sp>
+      <p:sp>
+        <p:nvSpPr>
+          <p:cNvPr id="46" name="TextBox 45"/>
+          <p:cNvSpPr txBox="1"/>
+          <p:nvPr/>
+        </p:nvSpPr>
+        <p:spPr>
+          <a:xfrm>
+            <a:off x="3456000" y="2340000"/>
+            <a:ext cx="648000" cy="288000"/>
+          </a:xfrm>
+          <a:prstGeom prst="rect">
+            <a:avLst/>
+          </a:prstGeom>
+          <a:noFill/>
+        </p:spPr>
+        <p:txBody>
+          <a:bodyPr wrap="square" anchor="ctr">
+            <a:spAutoFit/>
+          </a:bodyPr>
+          <a:lstStyle/>
+          <a:p>
+            <a:pPr algn="ctr"/>
+            <a:r>
+              <a:rPr sz="1000" b="1">
+                <a:solidFill>
+                  <a:srgbClr val="000000"/>
+                </a:solidFill>
+                <a:latin typeface="微软雅黑"/>
+              </a:rPr>
+              <a:t>双向层
+(BiLSTM)</a:t>
+            </a:r>
+          </a:p>
+        </p:txBody>
+      </p:sp>
+      <p:sp>
+        <p:nvSpPr>
+          <p:cNvPr id="47" name="TextBox 46"/>
+          <p:cNvSpPr txBox="1"/>
+          <p:nvPr/>
+        </p:nvSpPr>
+        <p:spPr>
+          <a:xfrm>
+            <a:off x="3456000" y="1800000"/>
+            <a:ext cx="648000" cy="288000"/>
+          </a:xfrm>
+          <a:prstGeom prst="rect">
+            <a:avLst/>
+          </a:prstGeom>
+          <a:noFill/>
+        </p:spPr>
+        <p:txBody>
+          <a:bodyPr wrap="square" anchor="ctr">
+            <a:spAutoFit/>
+          </a:bodyPr>
+          <a:lstStyle/>
+          <a:p>
+            <a:pPr algn="ctr"/>
+            <a:r>
+              <a:rPr sz="1000" b="1">
+                <a:solidFill>
+                  <a:srgbClr val="000000"/>
+                </a:solidFill>
+                <a:latin typeface="微软雅黑"/>
+              </a:rPr>
+              <a:t>输出层</a:t>
+            </a:r>
+          </a:p>
+        </p:txBody>
+      </p:sp>
+      <p:sp>
+        <p:nvSpPr>
+          <p:cNvPr id="48" name="Oval 47"/>
           <p:cNvSpPr/>
           <p:nvPr/>
         </p:nvSpPr>
         <p:spPr>
           <a:xfrm>
-            <a:off x="6948000" y="1993195"/>
-            <a:ext cx="900000" cy="549610"/>
+            <a:off x="4068000" y="2844000"/>
+            <a:ext cx="360000" cy="360000"/>
+          </a:xfrm>
+          <a:prstGeom prst="ellipse">
+            <a:avLst/>
+          </a:prstGeom>
+          <a:solidFill>
+            <a:srgbClr val="FFEBCD"/>
+          </a:solidFill>
+          <a:ln>
+            <a:solidFill>
+              <a:srgbClr val="646464"/>
+            </a:solidFill>
+          </a:ln>
+        </p:spPr>
+        <p:style>
+          <a:lnRef idx="1">
+            <a:schemeClr val="accent1"/>
+          </a:lnRef>
+          <a:fillRef idx="3">
+            <a:schemeClr val="accent1"/>
+          </a:fillRef>
+          <a:effectRef idx="2">
+            <a:schemeClr val="accent1"/>
+          </a:effectRef>
+          <a:fontRef idx="minor">
+            <a:schemeClr val="lt1"/>
+          </a:fontRef>
+        </p:style>
+        <p:txBody>
+          <a:bodyPr rtlCol="0" anchor="ctr"/>
+          <a:lstStyle/>
+          <a:p>
+            <a:pPr algn="ctr"/>
+          </a:p>
+        </p:txBody>
+      </p:sp>
+      <p:sp>
+        <p:nvSpPr>
+          <p:cNvPr id="49" name="TextBox 48"/>
+          <p:cNvSpPr txBox="1"/>
+          <p:nvPr/>
+        </p:nvSpPr>
+        <p:spPr>
+          <a:xfrm>
+            <a:off x="3888000" y="2844000"/>
+            <a:ext cx="720000" cy="360000"/>
+          </a:xfrm>
+          <a:prstGeom prst="rect">
+            <a:avLst/>
+          </a:prstGeom>
+          <a:noFill/>
+        </p:spPr>
+        <p:txBody>
+          <a:bodyPr wrap="square" anchor="ctr">
+            <a:spAutoFit/>
+          </a:bodyPr>
+          <a:lstStyle/>
+          <a:p>
+            <a:pPr algn="ctr"/>
+            <a:r>
+              <a:rPr sz="1000" b="1">
+                <a:solidFill>
+                  <a:srgbClr val="000000"/>
+                </a:solidFill>
+                <a:latin typeface="微软雅黑"/>
+              </a:rPr>
+              <a:t>x_t-1</a:t>
+            </a:r>
+          </a:p>
+        </p:txBody>
+      </p:sp>
+      <p:sp>
+        <p:nvSpPr>
+          <p:cNvPr id="50" name="Rounded Rectangle 49"/>
+          <p:cNvSpPr/>
+          <p:nvPr/>
+        </p:nvSpPr>
+        <p:spPr>
+          <a:xfrm>
+            <a:off x="3924000" y="2538000"/>
+            <a:ext cx="648000" cy="251999"/>
+          </a:xfrm>
+          <a:prstGeom prst="roundRect">
+            <a:avLst/>
+          </a:prstGeom>
+          <a:solidFill>
+            <a:srgbClr val="DCEBFF"/>
+          </a:solidFill>
+          <a:ln>
+            <a:solidFill>
+              <a:srgbClr val="646464"/>
+            </a:solidFill>
+          </a:ln>
+        </p:spPr>
+        <p:style>
+          <a:lnRef idx="1">
+            <a:schemeClr val="accent1"/>
+          </a:lnRef>
+          <a:fillRef idx="3">
+            <a:schemeClr val="accent1"/>
+          </a:fillRef>
+          <a:effectRef idx="2">
+            <a:schemeClr val="accent1"/>
+          </a:effectRef>
+          <a:fontRef idx="minor">
+            <a:schemeClr val="lt1"/>
+          </a:fontRef>
+        </p:style>
+        <p:txBody>
+          <a:bodyPr rtlCol="0" anchor="ctr"/>
+          <a:lstStyle/>
+          <a:p>
+            <a:pPr algn="ctr"/>
+          </a:p>
+        </p:txBody>
+      </p:sp>
+      <p:sp>
+        <p:nvSpPr>
+          <p:cNvPr id="51" name="TextBox 50"/>
+          <p:cNvSpPr txBox="1"/>
+          <p:nvPr/>
+        </p:nvSpPr>
+        <p:spPr>
+          <a:xfrm>
+            <a:off x="3924000" y="2538000"/>
+            <a:ext cx="648000" cy="251999"/>
+          </a:xfrm>
+          <a:prstGeom prst="rect">
+            <a:avLst/>
+          </a:prstGeom>
+          <a:noFill/>
+        </p:spPr>
+        <p:txBody>
+          <a:bodyPr wrap="square" anchor="ctr">
+            <a:spAutoFit/>
+          </a:bodyPr>
+          <a:lstStyle/>
+          <a:p>
+            <a:pPr algn="ctr"/>
+            <a:r>
+              <a:rPr sz="1000" b="1">
+                <a:solidFill>
+                  <a:srgbClr val="000000"/>
+                </a:solidFill>
+                <a:latin typeface="微软雅黑"/>
+              </a:rPr>
+              <a:t>LSTM</a:t>
+            </a:r>
+          </a:p>
+        </p:txBody>
+      </p:sp>
+      <p:sp>
+        <p:nvSpPr>
+          <p:cNvPr id="52" name="Rounded Rectangle 51"/>
+          <p:cNvSpPr/>
+          <p:nvPr/>
+        </p:nvSpPr>
+        <p:spPr>
+          <a:xfrm>
+            <a:off x="3924000" y="2178000"/>
+            <a:ext cx="648000" cy="251999"/>
+          </a:xfrm>
+          <a:prstGeom prst="roundRect">
+            <a:avLst/>
+          </a:prstGeom>
+          <a:solidFill>
+            <a:srgbClr val="DCEBFF"/>
+          </a:solidFill>
+          <a:ln>
+            <a:solidFill>
+              <a:srgbClr val="646464"/>
+            </a:solidFill>
+          </a:ln>
+        </p:spPr>
+        <p:style>
+          <a:lnRef idx="1">
+            <a:schemeClr val="accent1"/>
+          </a:lnRef>
+          <a:fillRef idx="3">
+            <a:schemeClr val="accent1"/>
+          </a:fillRef>
+          <a:effectRef idx="2">
+            <a:schemeClr val="accent1"/>
+          </a:effectRef>
+          <a:fontRef idx="minor">
+            <a:schemeClr val="lt1"/>
+          </a:fontRef>
+        </p:style>
+        <p:txBody>
+          <a:bodyPr rtlCol="0" anchor="ctr"/>
+          <a:lstStyle/>
+          <a:p>
+            <a:pPr algn="ctr"/>
+          </a:p>
+        </p:txBody>
+      </p:sp>
+      <p:sp>
+        <p:nvSpPr>
+          <p:cNvPr id="53" name="TextBox 52"/>
+          <p:cNvSpPr txBox="1"/>
+          <p:nvPr/>
+        </p:nvSpPr>
+        <p:spPr>
+          <a:xfrm>
+            <a:off x="3924000" y="2178000"/>
+            <a:ext cx="648000" cy="251999"/>
+          </a:xfrm>
+          <a:prstGeom prst="rect">
+            <a:avLst/>
+          </a:prstGeom>
+          <a:noFill/>
+        </p:spPr>
+        <p:txBody>
+          <a:bodyPr wrap="square" anchor="ctr">
+            <a:spAutoFit/>
+          </a:bodyPr>
+          <a:lstStyle/>
+          <a:p>
+            <a:pPr algn="ctr"/>
+            <a:r>
+              <a:rPr sz="1000" b="1">
+                <a:solidFill>
+                  <a:srgbClr val="000000"/>
+                </a:solidFill>
+                <a:latin typeface="微软雅黑"/>
+              </a:rPr>
+              <a:t>LSTM</a:t>
+            </a:r>
+          </a:p>
+        </p:txBody>
+      </p:sp>
+      <p:sp>
+        <p:nvSpPr>
+          <p:cNvPr id="54" name="Oval 53"/>
+          <p:cNvSpPr/>
+          <p:nvPr/>
+        </p:nvSpPr>
+        <p:spPr>
+          <a:xfrm>
+            <a:off x="4104000" y="1800000"/>
+            <a:ext cx="288000" cy="288000"/>
+          </a:xfrm>
+          <a:prstGeom prst="ellipse">
+            <a:avLst/>
+          </a:prstGeom>
+          <a:solidFill>
+            <a:srgbClr val="FFC0CB"/>
+          </a:solidFill>
+          <a:ln>
+            <a:solidFill>
+              <a:srgbClr val="646464"/>
+            </a:solidFill>
+          </a:ln>
+        </p:spPr>
+        <p:style>
+          <a:lnRef idx="1">
+            <a:schemeClr val="accent1"/>
+          </a:lnRef>
+          <a:fillRef idx="3">
+            <a:schemeClr val="accent1"/>
+          </a:fillRef>
+          <a:effectRef idx="2">
+            <a:schemeClr val="accent1"/>
+          </a:effectRef>
+          <a:fontRef idx="minor">
+            <a:schemeClr val="lt1"/>
+          </a:fontRef>
+        </p:style>
+        <p:txBody>
+          <a:bodyPr rtlCol="0" anchor="ctr"/>
+          <a:lstStyle/>
+          <a:p>
+            <a:pPr algn="ctr"/>
+          </a:p>
+        </p:txBody>
+      </p:sp>
+      <p:sp>
+        <p:nvSpPr>
+          <p:cNvPr id="55" name="TextBox 54"/>
+          <p:cNvSpPr txBox="1"/>
+          <p:nvPr/>
+        </p:nvSpPr>
+        <p:spPr>
+          <a:xfrm>
+            <a:off x="4104000" y="1800000"/>
+            <a:ext cx="288000" cy="288000"/>
+          </a:xfrm>
+          <a:prstGeom prst="rect">
+            <a:avLst/>
+          </a:prstGeom>
+          <a:noFill/>
+        </p:spPr>
+        <p:txBody>
+          <a:bodyPr wrap="square" anchor="ctr">
+            <a:spAutoFit/>
+          </a:bodyPr>
+          <a:lstStyle/>
+          <a:p>
+            <a:pPr algn="ctr"/>
+            <a:r>
+              <a:rPr sz="1400" b="1">
+                <a:solidFill>
+                  <a:srgbClr val="000000"/>
+                </a:solidFill>
+                <a:latin typeface="微软雅黑"/>
+              </a:rPr>
+              <a:t>+</a:t>
+            </a:r>
+          </a:p>
+        </p:txBody>
+      </p:sp>
+      <p:sp>
+        <p:nvSpPr>
+          <p:cNvPr id="56" name="TextBox 55"/>
+          <p:cNvSpPr txBox="1"/>
+          <p:nvPr/>
+        </p:nvSpPr>
+        <p:spPr>
+          <a:xfrm>
+            <a:off x="3888000" y="1728000"/>
+            <a:ext cx="720000" cy="216000"/>
+          </a:xfrm>
+          <a:prstGeom prst="rect">
+            <a:avLst/>
+          </a:prstGeom>
+          <a:noFill/>
+        </p:spPr>
+        <p:txBody>
+          <a:bodyPr wrap="square" anchor="ctr">
+            <a:spAutoFit/>
+          </a:bodyPr>
+          <a:lstStyle/>
+          <a:p>
+            <a:pPr algn="ctr"/>
+            <a:r>
+              <a:rPr sz="1000" b="1">
+                <a:solidFill>
+                  <a:srgbClr val="000000"/>
+                </a:solidFill>
+                <a:latin typeface="微软雅黑"/>
+              </a:rPr>
+              <a:t>y_t-1</a:t>
+            </a:r>
+          </a:p>
+        </p:txBody>
+      </p:sp>
+      <p:sp>
+        <p:nvSpPr>
+          <p:cNvPr id="57" name="Oval 56"/>
+          <p:cNvSpPr/>
+          <p:nvPr/>
+        </p:nvSpPr>
+        <p:spPr>
+          <a:xfrm>
+            <a:off x="5760000" y="2844000"/>
+            <a:ext cx="360000" cy="360000"/>
+          </a:xfrm>
+          <a:prstGeom prst="ellipse">
+            <a:avLst/>
+          </a:prstGeom>
+          <a:solidFill>
+            <a:srgbClr val="FFEBCD"/>
+          </a:solidFill>
+          <a:ln>
+            <a:solidFill>
+              <a:srgbClr val="646464"/>
+            </a:solidFill>
+          </a:ln>
+        </p:spPr>
+        <p:style>
+          <a:lnRef idx="1">
+            <a:schemeClr val="accent1"/>
+          </a:lnRef>
+          <a:fillRef idx="3">
+            <a:schemeClr val="accent1"/>
+          </a:fillRef>
+          <a:effectRef idx="2">
+            <a:schemeClr val="accent1"/>
+          </a:effectRef>
+          <a:fontRef idx="minor">
+            <a:schemeClr val="lt1"/>
+          </a:fontRef>
+        </p:style>
+        <p:txBody>
+          <a:bodyPr rtlCol="0" anchor="ctr"/>
+          <a:lstStyle/>
+          <a:p>
+            <a:pPr algn="ctr"/>
+          </a:p>
+        </p:txBody>
+      </p:sp>
+      <p:sp>
+        <p:nvSpPr>
+          <p:cNvPr id="58" name="TextBox 57"/>
+          <p:cNvSpPr txBox="1"/>
+          <p:nvPr/>
+        </p:nvSpPr>
+        <p:spPr>
+          <a:xfrm>
+            <a:off x="5580000" y="2844000"/>
+            <a:ext cx="720000" cy="360000"/>
+          </a:xfrm>
+          <a:prstGeom prst="rect">
+            <a:avLst/>
+          </a:prstGeom>
+          <a:noFill/>
+        </p:spPr>
+        <p:txBody>
+          <a:bodyPr wrap="square" anchor="ctr">
+            <a:spAutoFit/>
+          </a:bodyPr>
+          <a:lstStyle/>
+          <a:p>
+            <a:pPr algn="ctr"/>
+            <a:r>
+              <a:rPr sz="1000" b="1">
+                <a:solidFill>
+                  <a:srgbClr val="000000"/>
+                </a:solidFill>
+                <a:latin typeface="微软雅黑"/>
+              </a:rPr>
+              <a:t>x_t</a:t>
+            </a:r>
+          </a:p>
+        </p:txBody>
+      </p:sp>
+      <p:sp>
+        <p:nvSpPr>
+          <p:cNvPr id="59" name="Rounded Rectangle 58"/>
+          <p:cNvSpPr/>
+          <p:nvPr/>
+        </p:nvSpPr>
+        <p:spPr>
+          <a:xfrm>
+            <a:off x="5616000" y="2538000"/>
+            <a:ext cx="648000" cy="251999"/>
+          </a:xfrm>
+          <a:prstGeom prst="roundRect">
+            <a:avLst/>
+          </a:prstGeom>
+          <a:solidFill>
+            <a:srgbClr val="DCEBFF"/>
+          </a:solidFill>
+          <a:ln>
+            <a:solidFill>
+              <a:srgbClr val="646464"/>
+            </a:solidFill>
+          </a:ln>
+        </p:spPr>
+        <p:style>
+          <a:lnRef idx="1">
+            <a:schemeClr val="accent1"/>
+          </a:lnRef>
+          <a:fillRef idx="3">
+            <a:schemeClr val="accent1"/>
+          </a:fillRef>
+          <a:effectRef idx="2">
+            <a:schemeClr val="accent1"/>
+          </a:effectRef>
+          <a:fontRef idx="minor">
+            <a:schemeClr val="lt1"/>
+          </a:fontRef>
+        </p:style>
+        <p:txBody>
+          <a:bodyPr rtlCol="0" anchor="ctr"/>
+          <a:lstStyle/>
+          <a:p>
+            <a:pPr algn="ctr"/>
+          </a:p>
+        </p:txBody>
+      </p:sp>
+      <p:sp>
+        <p:nvSpPr>
+          <p:cNvPr id="60" name="TextBox 59"/>
+          <p:cNvSpPr txBox="1"/>
+          <p:nvPr/>
+        </p:nvSpPr>
+        <p:spPr>
+          <a:xfrm>
+            <a:off x="5616000" y="2538000"/>
+            <a:ext cx="648000" cy="251999"/>
+          </a:xfrm>
+          <a:prstGeom prst="rect">
+            <a:avLst/>
+          </a:prstGeom>
+          <a:noFill/>
+        </p:spPr>
+        <p:txBody>
+          <a:bodyPr wrap="square" anchor="ctr">
+            <a:spAutoFit/>
+          </a:bodyPr>
+          <a:lstStyle/>
+          <a:p>
+            <a:pPr algn="ctr"/>
+            <a:r>
+              <a:rPr sz="1000" b="1">
+                <a:solidFill>
+                  <a:srgbClr val="000000"/>
+                </a:solidFill>
+                <a:latin typeface="微软雅黑"/>
+              </a:rPr>
+              <a:t>LSTM</a:t>
+            </a:r>
+          </a:p>
+        </p:txBody>
+      </p:sp>
+      <p:sp>
+        <p:nvSpPr>
+          <p:cNvPr id="61" name="Rounded Rectangle 60"/>
+          <p:cNvSpPr/>
+          <p:nvPr/>
+        </p:nvSpPr>
+        <p:spPr>
+          <a:xfrm>
+            <a:off x="5616000" y="2178000"/>
+            <a:ext cx="648000" cy="251999"/>
+          </a:xfrm>
+          <a:prstGeom prst="roundRect">
+            <a:avLst/>
+          </a:prstGeom>
+          <a:solidFill>
+            <a:srgbClr val="DCEBFF"/>
+          </a:solidFill>
+          <a:ln>
+            <a:solidFill>
+              <a:srgbClr val="646464"/>
+            </a:solidFill>
+          </a:ln>
+        </p:spPr>
+        <p:style>
+          <a:lnRef idx="1">
+            <a:schemeClr val="accent1"/>
+          </a:lnRef>
+          <a:fillRef idx="3">
+            <a:schemeClr val="accent1"/>
+          </a:fillRef>
+          <a:effectRef idx="2">
+            <a:schemeClr val="accent1"/>
+          </a:effectRef>
+          <a:fontRef idx="minor">
+            <a:schemeClr val="lt1"/>
+          </a:fontRef>
+        </p:style>
+        <p:txBody>
+          <a:bodyPr rtlCol="0" anchor="ctr"/>
+          <a:lstStyle/>
+          <a:p>
+            <a:pPr algn="ctr"/>
+          </a:p>
+        </p:txBody>
+      </p:sp>
+      <p:sp>
+        <p:nvSpPr>
+          <p:cNvPr id="62" name="TextBox 61"/>
+          <p:cNvSpPr txBox="1"/>
+          <p:nvPr/>
+        </p:nvSpPr>
+        <p:spPr>
+          <a:xfrm>
+            <a:off x="5616000" y="2178000"/>
+            <a:ext cx="648000" cy="251999"/>
+          </a:xfrm>
+          <a:prstGeom prst="rect">
+            <a:avLst/>
+          </a:prstGeom>
+          <a:noFill/>
+        </p:spPr>
+        <p:txBody>
+          <a:bodyPr wrap="square" anchor="ctr">
+            <a:spAutoFit/>
+          </a:bodyPr>
+          <a:lstStyle/>
+          <a:p>
+            <a:pPr algn="ctr"/>
+            <a:r>
+              <a:rPr sz="1000" b="1">
+                <a:solidFill>
+                  <a:srgbClr val="000000"/>
+                </a:solidFill>
+                <a:latin typeface="微软雅黑"/>
+              </a:rPr>
+              <a:t>LSTM</a:t>
+            </a:r>
+          </a:p>
+        </p:txBody>
+      </p:sp>
+      <p:sp>
+        <p:nvSpPr>
+          <p:cNvPr id="63" name="Oval 62"/>
+          <p:cNvSpPr/>
+          <p:nvPr/>
+        </p:nvSpPr>
+        <p:spPr>
+          <a:xfrm>
+            <a:off x="5796000" y="1800000"/>
+            <a:ext cx="288000" cy="288000"/>
+          </a:xfrm>
+          <a:prstGeom prst="ellipse">
+            <a:avLst/>
+          </a:prstGeom>
+          <a:solidFill>
+            <a:srgbClr val="FFC0CB"/>
+          </a:solidFill>
+          <a:ln>
+            <a:solidFill>
+              <a:srgbClr val="646464"/>
+            </a:solidFill>
+          </a:ln>
+        </p:spPr>
+        <p:style>
+          <a:lnRef idx="1">
+            <a:schemeClr val="accent1"/>
+          </a:lnRef>
+          <a:fillRef idx="3">
+            <a:schemeClr val="accent1"/>
+          </a:fillRef>
+          <a:effectRef idx="2">
+            <a:schemeClr val="accent1"/>
+          </a:effectRef>
+          <a:fontRef idx="minor">
+            <a:schemeClr val="lt1"/>
+          </a:fontRef>
+        </p:style>
+        <p:txBody>
+          <a:bodyPr rtlCol="0" anchor="ctr"/>
+          <a:lstStyle/>
+          <a:p>
+            <a:pPr algn="ctr"/>
+          </a:p>
+        </p:txBody>
+      </p:sp>
+      <p:sp>
+        <p:nvSpPr>
+          <p:cNvPr id="64" name="TextBox 63"/>
+          <p:cNvSpPr txBox="1"/>
+          <p:nvPr/>
+        </p:nvSpPr>
+        <p:spPr>
+          <a:xfrm>
+            <a:off x="5796000" y="1800000"/>
+            <a:ext cx="288000" cy="288000"/>
+          </a:xfrm>
+          <a:prstGeom prst="rect">
+            <a:avLst/>
+          </a:prstGeom>
+          <a:noFill/>
+        </p:spPr>
+        <p:txBody>
+          <a:bodyPr wrap="square" anchor="ctr">
+            <a:spAutoFit/>
+          </a:bodyPr>
+          <a:lstStyle/>
+          <a:p>
+            <a:pPr algn="ctr"/>
+            <a:r>
+              <a:rPr sz="1400" b="1">
+                <a:solidFill>
+                  <a:srgbClr val="000000"/>
+                </a:solidFill>
+                <a:latin typeface="微软雅黑"/>
+              </a:rPr>
+              <a:t>+</a:t>
+            </a:r>
+          </a:p>
+        </p:txBody>
+      </p:sp>
+      <p:sp>
+        <p:nvSpPr>
+          <p:cNvPr id="65" name="TextBox 64"/>
+          <p:cNvSpPr txBox="1"/>
+          <p:nvPr/>
+        </p:nvSpPr>
+        <p:spPr>
+          <a:xfrm>
+            <a:off x="5580000" y="1728000"/>
+            <a:ext cx="720000" cy="216000"/>
+          </a:xfrm>
+          <a:prstGeom prst="rect">
+            <a:avLst/>
+          </a:prstGeom>
+          <a:noFill/>
+        </p:spPr>
+        <p:txBody>
+          <a:bodyPr wrap="square" anchor="ctr">
+            <a:spAutoFit/>
+          </a:bodyPr>
+          <a:lstStyle/>
+          <a:p>
+            <a:pPr algn="ctr"/>
+            <a:r>
+              <a:rPr sz="1000" b="1">
+                <a:solidFill>
+                  <a:srgbClr val="000000"/>
+                </a:solidFill>
+                <a:latin typeface="微软雅黑"/>
+              </a:rPr>
+              <a:t>y_t</a:t>
+            </a:r>
+          </a:p>
+        </p:txBody>
+      </p:sp>
+      <p:sp>
+        <p:nvSpPr>
+          <p:cNvPr id="66" name="Oval 65"/>
+          <p:cNvSpPr/>
+          <p:nvPr/>
+        </p:nvSpPr>
+        <p:spPr>
+          <a:xfrm>
+            <a:off x="7452000" y="2844000"/>
+            <a:ext cx="360000" cy="360000"/>
+          </a:xfrm>
+          <a:prstGeom prst="ellipse">
+            <a:avLst/>
+          </a:prstGeom>
+          <a:solidFill>
+            <a:srgbClr val="FFEBCD"/>
+          </a:solidFill>
+          <a:ln>
+            <a:solidFill>
+              <a:srgbClr val="646464"/>
+            </a:solidFill>
+          </a:ln>
+        </p:spPr>
+        <p:style>
+          <a:lnRef idx="1">
+            <a:schemeClr val="accent1"/>
+          </a:lnRef>
+          <a:fillRef idx="3">
+            <a:schemeClr val="accent1"/>
+          </a:fillRef>
+          <a:effectRef idx="2">
+            <a:schemeClr val="accent1"/>
+          </a:effectRef>
+          <a:fontRef idx="minor">
+            <a:schemeClr val="lt1"/>
+          </a:fontRef>
+        </p:style>
+        <p:txBody>
+          <a:bodyPr rtlCol="0" anchor="ctr"/>
+          <a:lstStyle/>
+          <a:p>
+            <a:pPr algn="ctr"/>
+          </a:p>
+        </p:txBody>
+      </p:sp>
+      <p:sp>
+        <p:nvSpPr>
+          <p:cNvPr id="67" name="TextBox 66"/>
+          <p:cNvSpPr txBox="1"/>
+          <p:nvPr/>
+        </p:nvSpPr>
+        <p:spPr>
+          <a:xfrm>
+            <a:off x="7272000" y="2844000"/>
+            <a:ext cx="720000" cy="360000"/>
+          </a:xfrm>
+          <a:prstGeom prst="rect">
+            <a:avLst/>
+          </a:prstGeom>
+          <a:noFill/>
+        </p:spPr>
+        <p:txBody>
+          <a:bodyPr wrap="square" anchor="ctr">
+            <a:spAutoFit/>
+          </a:bodyPr>
+          <a:lstStyle/>
+          <a:p>
+            <a:pPr algn="ctr"/>
+            <a:r>
+              <a:rPr sz="1000" b="1">
+                <a:solidFill>
+                  <a:srgbClr val="000000"/>
+                </a:solidFill>
+                <a:latin typeface="微软雅黑"/>
+              </a:rPr>
+              <a:t>x_t+1</a:t>
+            </a:r>
+          </a:p>
+        </p:txBody>
+      </p:sp>
+      <p:sp>
+        <p:nvSpPr>
+          <p:cNvPr id="68" name="Rounded Rectangle 67"/>
+          <p:cNvSpPr/>
+          <p:nvPr/>
+        </p:nvSpPr>
+        <p:spPr>
+          <a:xfrm>
+            <a:off x="7308000" y="2538000"/>
+            <a:ext cx="648000" cy="251999"/>
+          </a:xfrm>
+          <a:prstGeom prst="roundRect">
+            <a:avLst/>
+          </a:prstGeom>
+          <a:solidFill>
+            <a:srgbClr val="DCEBFF"/>
+          </a:solidFill>
+          <a:ln>
+            <a:solidFill>
+              <a:srgbClr val="646464"/>
+            </a:solidFill>
+          </a:ln>
+        </p:spPr>
+        <p:style>
+          <a:lnRef idx="1">
+            <a:schemeClr val="accent1"/>
+          </a:lnRef>
+          <a:fillRef idx="3">
+            <a:schemeClr val="accent1"/>
+          </a:fillRef>
+          <a:effectRef idx="2">
+            <a:schemeClr val="accent1"/>
+          </a:effectRef>
+          <a:fontRef idx="minor">
+            <a:schemeClr val="lt1"/>
+          </a:fontRef>
+        </p:style>
+        <p:txBody>
+          <a:bodyPr rtlCol="0" anchor="ctr"/>
+          <a:lstStyle/>
+          <a:p>
+            <a:pPr algn="ctr"/>
+          </a:p>
+        </p:txBody>
+      </p:sp>
+      <p:sp>
+        <p:nvSpPr>
+          <p:cNvPr id="69" name="TextBox 68"/>
+          <p:cNvSpPr txBox="1"/>
+          <p:nvPr/>
+        </p:nvSpPr>
+        <p:spPr>
+          <a:xfrm>
+            <a:off x="7308000" y="2538000"/>
+            <a:ext cx="648000" cy="251999"/>
+          </a:xfrm>
+          <a:prstGeom prst="rect">
+            <a:avLst/>
+          </a:prstGeom>
+          <a:noFill/>
+        </p:spPr>
+        <p:txBody>
+          <a:bodyPr wrap="square" anchor="ctr">
+            <a:spAutoFit/>
+          </a:bodyPr>
+          <a:lstStyle/>
+          <a:p>
+            <a:pPr algn="ctr"/>
+            <a:r>
+              <a:rPr sz="1000" b="1">
+                <a:solidFill>
+                  <a:srgbClr val="000000"/>
+                </a:solidFill>
+                <a:latin typeface="微软雅黑"/>
+              </a:rPr>
+              <a:t>LSTM</a:t>
+            </a:r>
+          </a:p>
+        </p:txBody>
+      </p:sp>
+      <p:sp>
+        <p:nvSpPr>
+          <p:cNvPr id="70" name="Rounded Rectangle 69"/>
+          <p:cNvSpPr/>
+          <p:nvPr/>
+        </p:nvSpPr>
+        <p:spPr>
+          <a:xfrm>
+            <a:off x="7308000" y="2178000"/>
+            <a:ext cx="648000" cy="251999"/>
+          </a:xfrm>
+          <a:prstGeom prst="roundRect">
+            <a:avLst/>
+          </a:prstGeom>
+          <a:solidFill>
+            <a:srgbClr val="DCEBFF"/>
+          </a:solidFill>
+          <a:ln>
+            <a:solidFill>
+              <a:srgbClr val="646464"/>
+            </a:solidFill>
+          </a:ln>
+        </p:spPr>
+        <p:style>
+          <a:lnRef idx="1">
+            <a:schemeClr val="accent1"/>
+          </a:lnRef>
+          <a:fillRef idx="3">
+            <a:schemeClr val="accent1"/>
+          </a:fillRef>
+          <a:effectRef idx="2">
+            <a:schemeClr val="accent1"/>
+          </a:effectRef>
+          <a:fontRef idx="minor">
+            <a:schemeClr val="lt1"/>
+          </a:fontRef>
+        </p:style>
+        <p:txBody>
+          <a:bodyPr rtlCol="0" anchor="ctr"/>
+          <a:lstStyle/>
+          <a:p>
+            <a:pPr algn="ctr"/>
+          </a:p>
+        </p:txBody>
+      </p:sp>
+      <p:sp>
+        <p:nvSpPr>
+          <p:cNvPr id="71" name="TextBox 70"/>
+          <p:cNvSpPr txBox="1"/>
+          <p:nvPr/>
+        </p:nvSpPr>
+        <p:spPr>
+          <a:xfrm>
+            <a:off x="7308000" y="2178000"/>
+            <a:ext cx="648000" cy="251999"/>
+          </a:xfrm>
+          <a:prstGeom prst="rect">
+            <a:avLst/>
+          </a:prstGeom>
+          <a:noFill/>
+        </p:spPr>
+        <p:txBody>
+          <a:bodyPr wrap="square" anchor="ctr">
+            <a:spAutoFit/>
+          </a:bodyPr>
+          <a:lstStyle/>
+          <a:p>
+            <a:pPr algn="ctr"/>
+            <a:r>
+              <a:rPr sz="1000" b="1">
+                <a:solidFill>
+                  <a:srgbClr val="000000"/>
+                </a:solidFill>
+                <a:latin typeface="微软雅黑"/>
+              </a:rPr>
+              <a:t>LSTM</a:t>
+            </a:r>
+          </a:p>
+        </p:txBody>
+      </p:sp>
+      <p:sp>
+        <p:nvSpPr>
+          <p:cNvPr id="72" name="Oval 71"/>
+          <p:cNvSpPr/>
+          <p:nvPr/>
+        </p:nvSpPr>
+        <p:spPr>
+          <a:xfrm>
+            <a:off x="7488000" y="1800000"/>
+            <a:ext cx="288000" cy="288000"/>
+          </a:xfrm>
+          <a:prstGeom prst="ellipse">
+            <a:avLst/>
+          </a:prstGeom>
+          <a:solidFill>
+            <a:srgbClr val="FFC0CB"/>
+          </a:solidFill>
+          <a:ln>
+            <a:solidFill>
+              <a:srgbClr val="646464"/>
+            </a:solidFill>
+          </a:ln>
+        </p:spPr>
+        <p:style>
+          <a:lnRef idx="1">
+            <a:schemeClr val="accent1"/>
+          </a:lnRef>
+          <a:fillRef idx="3">
+            <a:schemeClr val="accent1"/>
+          </a:fillRef>
+          <a:effectRef idx="2">
+            <a:schemeClr val="accent1"/>
+          </a:effectRef>
+          <a:fontRef idx="minor">
+            <a:schemeClr val="lt1"/>
+          </a:fontRef>
+        </p:style>
+        <p:txBody>
+          <a:bodyPr rtlCol="0" anchor="ctr"/>
+          <a:lstStyle/>
+          <a:p>
+            <a:pPr algn="ctr"/>
+          </a:p>
+        </p:txBody>
+      </p:sp>
+      <p:sp>
+        <p:nvSpPr>
+          <p:cNvPr id="73" name="TextBox 72"/>
+          <p:cNvSpPr txBox="1"/>
+          <p:nvPr/>
+        </p:nvSpPr>
+        <p:spPr>
+          <a:xfrm>
+            <a:off x="7488000" y="1800000"/>
+            <a:ext cx="288000" cy="288000"/>
+          </a:xfrm>
+          <a:prstGeom prst="rect">
+            <a:avLst/>
+          </a:prstGeom>
+          <a:noFill/>
+        </p:spPr>
+        <p:txBody>
+          <a:bodyPr wrap="square" anchor="ctr">
+            <a:spAutoFit/>
+          </a:bodyPr>
+          <a:lstStyle/>
+          <a:p>
+            <a:pPr algn="ctr"/>
+            <a:r>
+              <a:rPr sz="1400" b="1">
+                <a:solidFill>
+                  <a:srgbClr val="000000"/>
+                </a:solidFill>
+                <a:latin typeface="微软雅黑"/>
+              </a:rPr>
+              <a:t>+</a:t>
+            </a:r>
+          </a:p>
+        </p:txBody>
+      </p:sp>
+      <p:sp>
+        <p:nvSpPr>
+          <p:cNvPr id="74" name="TextBox 73"/>
+          <p:cNvSpPr txBox="1"/>
+          <p:nvPr/>
+        </p:nvSpPr>
+        <p:spPr>
+          <a:xfrm>
+            <a:off x="7272000" y="1728000"/>
+            <a:ext cx="720000" cy="216000"/>
+          </a:xfrm>
+          <a:prstGeom prst="rect">
+            <a:avLst/>
+          </a:prstGeom>
+          <a:noFill/>
+        </p:spPr>
+        <p:txBody>
+          <a:bodyPr wrap="square" anchor="ctr">
+            <a:spAutoFit/>
+          </a:bodyPr>
+          <a:lstStyle/>
+          <a:p>
+            <a:pPr algn="ctr"/>
+            <a:r>
+              <a:rPr sz="1000" b="1">
+                <a:solidFill>
+                  <a:srgbClr val="000000"/>
+                </a:solidFill>
+                <a:latin typeface="微软雅黑"/>
+              </a:rPr>
+              <a:t>y_t+1</a:t>
+            </a:r>
+          </a:p>
+        </p:txBody>
+      </p:sp>
+      <p:cxnSp>
+        <p:nvCxnSpPr>
+          <p:cNvPr id="75" name="Connector 74"/>
+          <p:cNvCxnSpPr/>
+          <p:nvPr/>
+        </p:nvCxnSpPr>
+        <p:spPr>
+          <a:xfrm>
+            <a:off x="7992000" y="1944000"/>
+            <a:ext cx="143999" cy="0"/>
+          </a:xfrm>
+          <a:prstGeom prst="line">
+            <a:avLst/>
+          </a:prstGeom>
+          <a:ln w="19050">
+            <a:solidFill>
+              <a:srgbClr val="646464"/>
+            </a:solidFill>
+          </a:ln>
+        </p:spPr>
+        <p:style>
+          <a:lnRef idx="2">
+            <a:schemeClr val="accent1"/>
+          </a:lnRef>
+          <a:fillRef idx="0">
+            <a:schemeClr val="accent1"/>
+          </a:fillRef>
+          <a:effectRef idx="1">
+            <a:schemeClr val="accent1"/>
+          </a:effectRef>
+          <a:fontRef idx="minor">
+            <a:schemeClr val="tx1"/>
+          </a:fontRef>
+        </p:style>
+      </p:cxnSp>
+      <p:sp>
+        <p:nvSpPr>
+          <p:cNvPr id="76" name="Rounded Rectangle 75"/>
+          <p:cNvSpPr/>
+          <p:nvPr/>
+        </p:nvSpPr>
+        <p:spPr>
+          <a:xfrm>
+            <a:off x="8135999" y="1800000"/>
+            <a:ext cx="792000" cy="288000"/>
           </a:xfrm>
           <a:prstGeom prst="roundRect">
             <a:avLst/>
@@ -4828,59 +5954,32 @@
           </a:fontRef>
         </p:style>
         <p:txBody>
-          <a:bodyPr wrap="square" rtlCol="0" anchor="ctr"/>
+          <a:bodyPr rtlCol="0" anchor="ctr" wrap="square"/>
           <a:lstStyle/>
           <a:p>
             <a:pPr algn="ctr"/>
             <a:r>
-              <a:rPr sz="1000" b="1" dirty="0" err="1">
+              <a:rPr sz="900" b="1">
                 <a:solidFill>
                   <a:srgbClr val="000000"/>
                 </a:solidFill>
                 <a:latin typeface="微软雅黑"/>
               </a:rPr>
-              <a:t>h_target</a:t>
-            </a:r>
-            <a:r>
-              <a:rPr sz="1000" b="1" dirty="0">
-                <a:solidFill>
-                  <a:srgbClr val="000000"/>
-                </a:solidFill>
-                <a:latin typeface="微软雅黑"/>
-              </a:rPr>
-              <a:t>
-(</a:t>
-            </a:r>
-            <a:r>
-              <a:rPr sz="1000" b="1" dirty="0" err="1">
-                <a:solidFill>
-                  <a:srgbClr val="000000"/>
-                </a:solidFill>
-                <a:latin typeface="微软雅黑"/>
-              </a:rPr>
-              <a:t>上下文特征</a:t>
-            </a:r>
-            <a:r>
-              <a:rPr sz="1000" b="1" dirty="0">
-                <a:solidFill>
-                  <a:srgbClr val="000000"/>
-                </a:solidFill>
-                <a:latin typeface="微软雅黑"/>
-              </a:rPr>
-              <a:t>)</a:t>
-            </a:r>
-          </a:p>
-        </p:txBody>
-      </p:sp>
-      <p:sp>
-        <p:nvSpPr>
-          <p:cNvPr id="46" name="TextBox 45"/>
+              <a:t>h_target
+(上下文)</a:t>
+            </a:r>
+          </a:p>
+        </p:txBody>
+      </p:sp>
+      <p:sp>
+        <p:nvSpPr>
+          <p:cNvPr id="77" name="TextBox 76"/>
           <p:cNvSpPr txBox="1"/>
           <p:nvPr/>
         </p:nvSpPr>
         <p:spPr>
           <a:xfrm>
-            <a:off x="3420000" y="3096000"/>
+            <a:off x="3420000" y="3240000"/>
             <a:ext cx="5220000" cy="288000"/>
           </a:xfrm>
           <a:prstGeom prst="rect">
@@ -4909,7 +6008,7 @@
       </p:sp>
       <p:sp>
         <p:nvSpPr>
-          <p:cNvPr id="47" name="Rounded Rectangle 46"/>
+          <p:cNvPr id="78" name="Rounded Rectangle 77"/>
           <p:cNvSpPr/>
           <p:nvPr/>
         </p:nvSpPr>
@@ -4949,13 +6048,12 @@
           <a:lstStyle/>
           <a:p>
             <a:pPr algn="ctr"/>
-            <a:endParaRPr/>
-          </a:p>
-        </p:txBody>
-      </p:sp>
-      <p:sp>
-        <p:nvSpPr>
-          <p:cNvPr id="48" name="TextBox 47"/>
+          </a:p>
+        </p:txBody>
+      </p:sp>
+      <p:sp>
+        <p:nvSpPr>
+          <p:cNvPr id="79" name="TextBox 78"/>
           <p:cNvSpPr txBox="1"/>
           <p:nvPr/>
         </p:nvSpPr>
@@ -4990,14 +6088,14 @@
       </p:sp>
       <p:sp>
         <p:nvSpPr>
-          <p:cNvPr id="49" name="Rounded Rectangle 48"/>
+          <p:cNvPr id="80" name="Rounded Rectangle 79"/>
           <p:cNvSpPr/>
           <p:nvPr/>
         </p:nvSpPr>
         <p:spPr>
           <a:xfrm>
             <a:off x="3600000" y="4320000"/>
-            <a:ext cx="1007999" cy="720000"/>
+            <a:ext cx="1007999" cy="432000"/>
           </a:xfrm>
           <a:prstGeom prst="roundRect">
             <a:avLst/>
@@ -5026,60 +6124,33 @@
           </a:fontRef>
         </p:style>
         <p:txBody>
-          <a:bodyPr wrap="square" rtlCol="0" anchor="ctr"/>
+          <a:bodyPr rtlCol="0" anchor="ctr" wrap="square"/>
           <a:lstStyle/>
           <a:p>
             <a:pPr algn="ctr"/>
             <a:r>
-              <a:rPr sz="1100" b="1" dirty="0" err="1">
+              <a:rPr sz="1100" b="1">
                 <a:solidFill>
                   <a:srgbClr val="000000"/>
                 </a:solidFill>
                 <a:latin typeface="微软雅黑"/>
               </a:rPr>
-              <a:t>h_target</a:t>
-            </a:r>
-            <a:r>
-              <a:rPr sz="1100" b="1" dirty="0">
-                <a:solidFill>
-                  <a:srgbClr val="000000"/>
-                </a:solidFill>
-                <a:latin typeface="微软雅黑"/>
-              </a:rPr>
-              <a:t>
-(</a:t>
-            </a:r>
-            <a:r>
-              <a:rPr sz="1100" b="1" dirty="0" err="1">
-                <a:solidFill>
-                  <a:srgbClr val="000000"/>
-                </a:solidFill>
-                <a:latin typeface="微软雅黑"/>
-              </a:rPr>
-              <a:t>时序上下文表示</a:t>
-            </a:r>
-            <a:r>
-              <a:rPr sz="1100" b="1" dirty="0">
-                <a:solidFill>
-                  <a:srgbClr val="000000"/>
-                </a:solidFill>
-                <a:latin typeface="微软雅黑"/>
-              </a:rPr>
-              <a:t>)</a:t>
-            </a:r>
-          </a:p>
-        </p:txBody>
-      </p:sp>
-      <p:sp>
-        <p:nvSpPr>
-          <p:cNvPr id="50" name="Rounded Rectangle 49"/>
+              <a:t>h_target
+(时序上下文表示)</a:t>
+            </a:r>
+          </a:p>
+        </p:txBody>
+      </p:sp>
+      <p:sp>
+        <p:nvSpPr>
+          <p:cNvPr id="81" name="Rounded Rectangle 80"/>
           <p:cNvSpPr/>
           <p:nvPr/>
         </p:nvSpPr>
         <p:spPr>
           <a:xfrm>
-            <a:off x="3600000" y="5292000"/>
-            <a:ext cx="1007999" cy="720000"/>
+            <a:off x="3600000" y="5580000"/>
+            <a:ext cx="1007999" cy="432000"/>
           </a:xfrm>
           <a:prstGeom prst="roundRect">
             <a:avLst/>
@@ -5108,53 +6179,26 @@
           </a:fontRef>
         </p:style>
         <p:txBody>
-          <a:bodyPr wrap="square" rtlCol="0" anchor="ctr"/>
+          <a:bodyPr rtlCol="0" anchor="ctr" wrap="square"/>
           <a:lstStyle/>
           <a:p>
             <a:pPr algn="ctr"/>
             <a:r>
-              <a:rPr sz="1100" b="1" dirty="0" err="1">
+              <a:rPr sz="1100" b="1">
                 <a:solidFill>
                   <a:srgbClr val="000000"/>
                 </a:solidFill>
                 <a:latin typeface="微软雅黑"/>
               </a:rPr>
-              <a:t>x_target</a:t>
-            </a:r>
-            <a:r>
-              <a:rPr sz="1100" b="1" dirty="0">
-                <a:solidFill>
-                  <a:srgbClr val="000000"/>
-                </a:solidFill>
-                <a:latin typeface="微软雅黑"/>
-              </a:rPr>
-              <a:t>
-(</a:t>
-            </a:r>
-            <a:r>
-              <a:rPr sz="1100" b="1" dirty="0" err="1">
-                <a:solidFill>
-                  <a:srgbClr val="000000"/>
-                </a:solidFill>
-                <a:latin typeface="微软雅黑"/>
-              </a:rPr>
-              <a:t>当前深度物理特征</a:t>
-            </a:r>
-            <a:r>
-              <a:rPr sz="1100" b="1" dirty="0">
-                <a:solidFill>
-                  <a:srgbClr val="000000"/>
-                </a:solidFill>
-                <a:latin typeface="微软雅黑"/>
-              </a:rPr>
-              <a:t>)</a:t>
+              <a:t>x_target
+(当前深度物理特征)</a:t>
             </a:r>
           </a:p>
         </p:txBody>
       </p:sp>
       <p:cxnSp>
         <p:nvCxnSpPr>
-          <p:cNvPr id="51" name="Connector 50"/>
+          <p:cNvPr id="82" name="Connector 81"/>
           <p:cNvCxnSpPr/>
           <p:nvPr/>
         </p:nvCxnSpPr>
@@ -5189,7 +6233,7 @@
       </p:cxnSp>
       <p:cxnSp>
         <p:nvCxnSpPr>
-          <p:cNvPr id="52" name="Connector 51"/>
+          <p:cNvPr id="83" name="Connector 82"/>
           <p:cNvCxnSpPr/>
           <p:nvPr/>
         </p:nvCxnSpPr>
@@ -5224,7 +6268,7 @@
       </p:cxnSp>
       <p:sp>
         <p:nvSpPr>
-          <p:cNvPr id="53" name="Oval 52"/>
+          <p:cNvPr id="84" name="Oval 83"/>
           <p:cNvSpPr/>
           <p:nvPr/>
         </p:nvSpPr>
@@ -5264,13 +6308,12 @@
           <a:lstStyle/>
           <a:p>
             <a:pPr algn="ctr"/>
-            <a:endParaRPr/>
-          </a:p>
-        </p:txBody>
-      </p:sp>
-      <p:sp>
-        <p:nvSpPr>
-          <p:cNvPr id="54" name="TextBox 53"/>
+          </a:p>
+        </p:txBody>
+      </p:sp>
+      <p:sp>
+        <p:nvSpPr>
+          <p:cNvPr id="85" name="TextBox 84"/>
           <p:cNvSpPr txBox="1"/>
           <p:nvPr/>
         </p:nvSpPr>
@@ -5306,7 +6349,7 @@
       </p:sp>
       <p:cxnSp>
         <p:nvCxnSpPr>
-          <p:cNvPr id="55" name="Connector 54"/>
+          <p:cNvPr id="86" name="Connector 85"/>
           <p:cNvCxnSpPr/>
           <p:nvPr/>
         </p:nvCxnSpPr>
@@ -5341,14 +6384,14 @@
       </p:cxnSp>
       <p:sp>
         <p:nvSpPr>
-          <p:cNvPr id="56" name="Rounded Rectangle 55"/>
+          <p:cNvPr id="87" name="Rounded Rectangle 86"/>
           <p:cNvSpPr/>
           <p:nvPr/>
         </p:nvSpPr>
         <p:spPr>
           <a:xfrm>
-            <a:off x="6120000" y="4716000"/>
-            <a:ext cx="900000" cy="864000"/>
+            <a:off x="6120000" y="4860000"/>
+            <a:ext cx="900000" cy="576000"/>
           </a:xfrm>
           <a:prstGeom prst="roundRect">
             <a:avLst/>
@@ -5377,53 +6420,26 @@
           </a:fontRef>
         </p:style>
         <p:txBody>
-          <a:bodyPr wrap="square" rtlCol="0" anchor="ctr"/>
+          <a:bodyPr rtlCol="0" anchor="ctr" wrap="square"/>
           <a:lstStyle/>
           <a:p>
             <a:pPr algn="ctr"/>
             <a:r>
-              <a:rPr sz="1100" b="1" dirty="0" err="1">
+              <a:rPr sz="1100" b="1">
                 <a:solidFill>
                   <a:srgbClr val="000000"/>
                 </a:solidFill>
                 <a:latin typeface="微软雅黑"/>
               </a:rPr>
-              <a:t>Sigmoid激活</a:t>
-            </a:r>
-            <a:r>
-              <a:rPr sz="1100" b="1" dirty="0">
-                <a:solidFill>
-                  <a:srgbClr val="000000"/>
-                </a:solidFill>
-                <a:latin typeface="微软雅黑"/>
-              </a:rPr>
-              <a:t>
-</a:t>
-            </a:r>
-            <a:r>
-              <a:rPr sz="1100" b="1" dirty="0" err="1">
-                <a:solidFill>
-                  <a:srgbClr val="000000"/>
-                </a:solidFill>
-                <a:latin typeface="微软雅黑"/>
-              </a:rPr>
-              <a:t>分配权重</a:t>
-            </a:r>
-            <a:r>
-              <a:rPr sz="1100" b="1" dirty="0">
-                <a:solidFill>
-                  <a:srgbClr val="000000"/>
-                </a:solidFill>
-                <a:latin typeface="微软雅黑"/>
-              </a:rPr>
-              <a:t>(α)</a:t>
+              <a:t>Softmax激活
+分配权重(α)</a:t>
             </a:r>
           </a:p>
         </p:txBody>
       </p:sp>
       <p:cxnSp>
         <p:nvCxnSpPr>
-          <p:cNvPr id="57" name="Connector 56"/>
+          <p:cNvPr id="88" name="Connector 87"/>
           <p:cNvCxnSpPr/>
           <p:nvPr/>
         </p:nvCxnSpPr>
@@ -5458,7 +6474,7 @@
       </p:cxnSp>
       <p:cxnSp>
         <p:nvCxnSpPr>
-          <p:cNvPr id="58" name="Connector 57"/>
+          <p:cNvPr id="89" name="Connector 88"/>
           <p:cNvCxnSpPr/>
           <p:nvPr/>
         </p:nvCxnSpPr>
@@ -5493,7 +6509,7 @@
       </p:cxnSp>
       <p:cxnSp>
         <p:nvCxnSpPr>
-          <p:cNvPr id="59" name="Connector 58"/>
+          <p:cNvPr id="90" name="Connector 89"/>
           <p:cNvCxnSpPr/>
           <p:nvPr/>
         </p:nvCxnSpPr>
@@ -5528,7 +6544,7 @@
       </p:cxnSp>
       <p:cxnSp>
         <p:nvCxnSpPr>
-          <p:cNvPr id="60" name="Connector 59"/>
+          <p:cNvPr id="91" name="Connector 90"/>
           <p:cNvCxnSpPr/>
           <p:nvPr/>
         </p:nvCxnSpPr>
@@ -5563,14 +6579,14 @@
       </p:cxnSp>
       <p:sp>
         <p:nvSpPr>
-          <p:cNvPr id="61" name="Rounded Rectangle 60"/>
+          <p:cNvPr id="92" name="Rounded Rectangle 91"/>
           <p:cNvSpPr/>
           <p:nvPr/>
         </p:nvSpPr>
         <p:spPr>
           <a:xfrm>
-            <a:off x="7488000" y="4680000"/>
-            <a:ext cx="900000" cy="936000"/>
+            <a:off x="7488000" y="4860000"/>
+            <a:ext cx="900000" cy="576000"/>
           </a:xfrm>
           <a:prstGeom prst="roundRect">
             <a:avLst/>
@@ -5599,57 +6615,33 @@
           </a:fontRef>
         </p:style>
         <p:txBody>
-          <a:bodyPr wrap="square" rtlCol="0" anchor="ctr"/>
+          <a:bodyPr rtlCol="0" anchor="ctr" wrap="square"/>
           <a:lstStyle/>
           <a:p>
             <a:pPr algn="ctr"/>
             <a:r>
-              <a:rPr sz="1100" b="1" dirty="0" err="1">
+              <a:rPr sz="1100" b="1">
                 <a:solidFill>
                   <a:srgbClr val="000000"/>
                 </a:solidFill>
                 <a:latin typeface="微软雅黑"/>
               </a:rPr>
-              <a:t>特征贡献度加权</a:t>
-            </a:r>
-            <a:r>
-              <a:rPr sz="1100" b="1" dirty="0">
-                <a:solidFill>
-                  <a:srgbClr val="000000"/>
-                </a:solidFill>
-                <a:latin typeface="微软雅黑"/>
-              </a:rPr>
-              <a:t>
-α ⊙ </a:t>
-            </a:r>
-            <a:r>
-              <a:rPr sz="1100" b="1" dirty="0" err="1">
-                <a:solidFill>
-                  <a:srgbClr val="000000"/>
-                </a:solidFill>
-                <a:latin typeface="微软雅黑"/>
-              </a:rPr>
-              <a:t>x_target</a:t>
-            </a:r>
-            <a:endParaRPr sz="1100" b="1" dirty="0">
-              <a:solidFill>
-                <a:srgbClr val="000000"/>
-              </a:solidFill>
-              <a:latin typeface="微软雅黑"/>
-            </a:endParaRPr>
-          </a:p>
-        </p:txBody>
-      </p:sp>
-      <p:sp>
-        <p:nvSpPr>
-          <p:cNvPr id="62" name="TextBox 61"/>
+              <a:t>特征贡献度加权
+α ⊙ x_target</a:t>
+            </a:r>
+          </a:p>
+        </p:txBody>
+      </p:sp>
+      <p:sp>
+        <p:nvSpPr>
+          <p:cNvPr id="93" name="TextBox 92"/>
           <p:cNvSpPr txBox="1"/>
           <p:nvPr/>
         </p:nvSpPr>
         <p:spPr>
           <a:xfrm>
-            <a:off x="3599999" y="4009195"/>
-            <a:ext cx="4939701" cy="261610"/>
+            <a:off x="3600000" y="3960000"/>
+            <a:ext cx="4860000" cy="360000"/>
           </a:xfrm>
           <a:prstGeom prst="rect">
             <a:avLst/>
@@ -5664,105 +6656,277 @@
           <a:p>
             <a:pPr algn="l"/>
             <a:r>
-              <a:rPr sz="1100" b="0" dirty="0" err="1">
+              <a:rPr sz="1100" b="0">
                 <a:solidFill>
                   <a:srgbClr val="646464"/>
                 </a:solidFill>
                 <a:latin typeface="微软雅黑"/>
               </a:rPr>
-              <a:t>逻辑：上下文</a:t>
-            </a:r>
-            <a:r>
-              <a:rPr sz="1100" b="0" dirty="0">
+              <a:t>逻辑：上下文 h_target 决定当前环境下，各个物理参数 x_target 的贡献大小</a:t>
+            </a:r>
+          </a:p>
+        </p:txBody>
+      </p:sp>
+      <p:cxnSp>
+        <p:nvCxnSpPr>
+          <p:cNvPr id="94" name="Connector 93"/>
+          <p:cNvCxnSpPr/>
+          <p:nvPr/>
+        </p:nvCxnSpPr>
+        <p:spPr>
+          <a:xfrm>
+            <a:off x="8532000" y="2088000"/>
+            <a:ext cx="0" cy="1440000"/>
+          </a:xfrm>
+          <a:prstGeom prst="line">
+            <a:avLst/>
+          </a:prstGeom>
+          <a:ln w="15240">
+            <a:solidFill>
+              <a:srgbClr val="D29696"/>
+            </a:solidFill>
+            <a:prstDash val="dash"/>
+          </a:ln>
+        </p:spPr>
+        <p:style>
+          <a:lnRef idx="2">
+            <a:schemeClr val="accent1"/>
+          </a:lnRef>
+          <a:fillRef idx="0">
+            <a:schemeClr val="accent1"/>
+          </a:fillRef>
+          <a:effectRef idx="1">
+            <a:schemeClr val="accent1"/>
+          </a:effectRef>
+          <a:fontRef idx="minor">
+            <a:schemeClr val="tx1"/>
+          </a:fontRef>
+        </p:style>
+      </p:cxnSp>
+      <p:cxnSp>
+        <p:nvCxnSpPr>
+          <p:cNvPr id="95" name="Connector 94"/>
+          <p:cNvCxnSpPr/>
+          <p:nvPr/>
+        </p:nvCxnSpPr>
+        <p:spPr>
+          <a:xfrm flipH="1">
+            <a:off x="4104000" y="3528000"/>
+            <a:ext cx="4428000" cy="0"/>
+          </a:xfrm>
+          <a:prstGeom prst="line">
+            <a:avLst/>
+          </a:prstGeom>
+          <a:ln w="15240">
+            <a:solidFill>
+              <a:srgbClr val="D29696"/>
+            </a:solidFill>
+            <a:prstDash val="dash"/>
+          </a:ln>
+        </p:spPr>
+        <p:style>
+          <a:lnRef idx="2">
+            <a:schemeClr val="accent1"/>
+          </a:lnRef>
+          <a:fillRef idx="0">
+            <a:schemeClr val="accent1"/>
+          </a:fillRef>
+          <a:effectRef idx="1">
+            <a:schemeClr val="accent1"/>
+          </a:effectRef>
+          <a:fontRef idx="minor">
+            <a:schemeClr val="tx1"/>
+          </a:fontRef>
+        </p:style>
+      </p:cxnSp>
+      <p:cxnSp>
+        <p:nvCxnSpPr>
+          <p:cNvPr id="96" name="Connector 95"/>
+          <p:cNvCxnSpPr/>
+          <p:nvPr/>
+        </p:nvCxnSpPr>
+        <p:spPr>
+          <a:xfrm>
+            <a:off x="4104000" y="3528000"/>
+            <a:ext cx="0" cy="792000"/>
+          </a:xfrm>
+          <a:prstGeom prst="line">
+            <a:avLst/>
+          </a:prstGeom>
+          <a:ln w="15240">
+            <a:solidFill>
+              <a:srgbClr val="D29696"/>
+            </a:solidFill>
+            <a:prstDash val="dash"/>
+          </a:ln>
+        </p:spPr>
+        <p:style>
+          <a:lnRef idx="2">
+            <a:schemeClr val="accent1"/>
+          </a:lnRef>
+          <a:fillRef idx="0">
+            <a:schemeClr val="accent1"/>
+          </a:fillRef>
+          <a:effectRef idx="1">
+            <a:schemeClr val="accent1"/>
+          </a:effectRef>
+          <a:fontRef idx="minor">
+            <a:schemeClr val="tx1"/>
+          </a:fontRef>
+        </p:style>
+      </p:cxnSp>
+      <p:sp>
+        <p:nvSpPr>
+          <p:cNvPr id="97" name="TextBox 96"/>
+          <p:cNvSpPr txBox="1"/>
+          <p:nvPr/>
+        </p:nvSpPr>
+        <p:spPr>
+          <a:xfrm>
+            <a:off x="7560000" y="3528000"/>
+            <a:ext cx="900000" cy="216000"/>
+          </a:xfrm>
+          <a:prstGeom prst="rect">
+            <a:avLst/>
+          </a:prstGeom>
+          <a:noFill/>
+        </p:spPr>
+        <p:txBody>
+          <a:bodyPr wrap="square" anchor="ctr">
+            <a:spAutoFit/>
+          </a:bodyPr>
+          <a:lstStyle/>
+          <a:p>
+            <a:pPr algn="ctr"/>
+            <a:r>
+              <a:rPr sz="1000" b="1">
                 <a:solidFill>
-                  <a:srgbClr val="646464"/>
+                  <a:srgbClr val="B46464"/>
                 </a:solidFill>
                 <a:latin typeface="微软雅黑"/>
               </a:rPr>
-              <a:t> </a:t>
-            </a:r>
-            <a:r>
-              <a:rPr sz="1100" b="0" dirty="0" err="1">
+              <a:t>上下文状态传递</a:t>
+            </a:r>
+          </a:p>
+        </p:txBody>
+      </p:sp>
+      <p:cxnSp>
+        <p:nvCxnSpPr>
+          <p:cNvPr id="98" name="Connector 97"/>
+          <p:cNvCxnSpPr/>
+          <p:nvPr/>
+        </p:nvCxnSpPr>
+        <p:spPr>
+          <a:xfrm>
+            <a:off x="5940000" y="3204000"/>
+            <a:ext cx="0" cy="2592000"/>
+          </a:xfrm>
+          <a:prstGeom prst="line">
+            <a:avLst/>
+          </a:prstGeom>
+          <a:ln w="15240">
+            <a:solidFill>
+              <a:srgbClr val="96B496"/>
+            </a:solidFill>
+            <a:prstDash val="dash"/>
+          </a:ln>
+        </p:spPr>
+        <p:style>
+          <a:lnRef idx="2">
+            <a:schemeClr val="accent1"/>
+          </a:lnRef>
+          <a:fillRef idx="0">
+            <a:schemeClr val="accent1"/>
+          </a:fillRef>
+          <a:effectRef idx="1">
+            <a:schemeClr val="accent1"/>
+          </a:effectRef>
+          <a:fontRef idx="minor">
+            <a:schemeClr val="tx1"/>
+          </a:fontRef>
+        </p:style>
+      </p:cxnSp>
+      <p:cxnSp>
+        <p:nvCxnSpPr>
+          <p:cNvPr id="99" name="Connector 98"/>
+          <p:cNvCxnSpPr/>
+          <p:nvPr/>
+        </p:nvCxnSpPr>
+        <p:spPr>
+          <a:xfrm flipH="1">
+            <a:off x="4608000" y="5796000"/>
+            <a:ext cx="1332000" cy="0"/>
+          </a:xfrm>
+          <a:prstGeom prst="line">
+            <a:avLst/>
+          </a:prstGeom>
+          <a:ln w="15240">
+            <a:solidFill>
+              <a:srgbClr val="96B496"/>
+            </a:solidFill>
+            <a:prstDash val="dash"/>
+          </a:ln>
+        </p:spPr>
+        <p:style>
+          <a:lnRef idx="2">
+            <a:schemeClr val="accent1"/>
+          </a:lnRef>
+          <a:fillRef idx="0">
+            <a:schemeClr val="accent1"/>
+          </a:fillRef>
+          <a:effectRef idx="1">
+            <a:schemeClr val="accent1"/>
+          </a:effectRef>
+          <a:fontRef idx="minor">
+            <a:schemeClr val="tx1"/>
+          </a:fontRef>
+        </p:style>
+      </p:cxnSp>
+      <p:sp>
+        <p:nvSpPr>
+          <p:cNvPr id="100" name="TextBox 99"/>
+          <p:cNvSpPr txBox="1"/>
+          <p:nvPr/>
+        </p:nvSpPr>
+        <p:spPr>
+          <a:xfrm>
+            <a:off x="5508000" y="5616000"/>
+            <a:ext cx="900000" cy="216000"/>
+          </a:xfrm>
+          <a:prstGeom prst="rect">
+            <a:avLst/>
+          </a:prstGeom>
+          <a:noFill/>
+        </p:spPr>
+        <p:txBody>
+          <a:bodyPr wrap="square" anchor="ctr">
+            <a:spAutoFit/>
+          </a:bodyPr>
+          <a:lstStyle/>
+          <a:p>
+            <a:pPr algn="ctr"/>
+            <a:r>
+              <a:rPr sz="1000" b="1">
                 <a:solidFill>
-                  <a:srgbClr val="646464"/>
+                  <a:srgbClr val="64A064"/>
                 </a:solidFill>
                 <a:latin typeface="微软雅黑"/>
               </a:rPr>
-              <a:t>h_target</a:t>
-            </a:r>
-            <a:r>
-              <a:rPr sz="1100" b="0" dirty="0">
-                <a:solidFill>
-                  <a:srgbClr val="646464"/>
-                </a:solidFill>
-                <a:latin typeface="微软雅黑"/>
-              </a:rPr>
-              <a:t> </a:t>
-            </a:r>
-            <a:r>
-              <a:rPr sz="1100" b="0" dirty="0" err="1">
-                <a:solidFill>
-                  <a:srgbClr val="646464"/>
-                </a:solidFill>
-                <a:latin typeface="微软雅黑"/>
-              </a:rPr>
-              <a:t>决定当前环境下，各个物理参数</a:t>
-            </a:r>
-            <a:r>
-              <a:rPr sz="1100" b="0" dirty="0">
-                <a:solidFill>
-                  <a:srgbClr val="646464"/>
-                </a:solidFill>
-                <a:latin typeface="微软雅黑"/>
-              </a:rPr>
-              <a:t> </a:t>
-            </a:r>
-            <a:r>
-              <a:rPr sz="1100" b="0" dirty="0" err="1">
-                <a:solidFill>
-                  <a:srgbClr val="646464"/>
-                </a:solidFill>
-                <a:latin typeface="微软雅黑"/>
-              </a:rPr>
-              <a:t>x_target</a:t>
-            </a:r>
-            <a:r>
-              <a:rPr sz="1100" b="0" dirty="0">
-                <a:solidFill>
-                  <a:srgbClr val="646464"/>
-                </a:solidFill>
-                <a:latin typeface="微软雅黑"/>
-              </a:rPr>
-              <a:t> </a:t>
-            </a:r>
-            <a:r>
-              <a:rPr sz="1100" b="0" dirty="0" err="1">
-                <a:solidFill>
-                  <a:srgbClr val="646464"/>
-                </a:solidFill>
-                <a:latin typeface="微软雅黑"/>
-              </a:rPr>
-              <a:t>的贡献大小</a:t>
-            </a:r>
-            <a:endParaRPr sz="1100" b="0" dirty="0">
-              <a:solidFill>
-                <a:srgbClr val="646464"/>
-              </a:solidFill>
-              <a:latin typeface="微软雅黑"/>
-            </a:endParaRPr>
-          </a:p>
-        </p:txBody>
-      </p:sp>
-      <p:sp>
-        <p:nvSpPr>
-          <p:cNvPr id="63" name="Rounded Rectangle 62"/>
+              <a:t>当前时刻物理特征</a:t>
+            </a:r>
+          </a:p>
+        </p:txBody>
+      </p:sp>
+      <p:sp>
+        <p:nvSpPr>
+          <p:cNvPr id="101" name="Rounded Rectangle 100"/>
           <p:cNvSpPr/>
           <p:nvPr/>
         </p:nvSpPr>
         <p:spPr>
           <a:xfrm>
-            <a:off x="9180000" y="1519512"/>
-            <a:ext cx="2448000" cy="1198487"/>
+            <a:off x="9180000" y="1260000"/>
+            <a:ext cx="2448000" cy="1260000"/>
           </a:xfrm>
           <a:prstGeom prst="roundRect">
             <a:avLst/>
@@ -5795,19 +6959,18 @@
           <a:lstStyle/>
           <a:p>
             <a:pPr algn="ctr"/>
-            <a:endParaRPr/>
-          </a:p>
-        </p:txBody>
-      </p:sp>
-      <p:sp>
-        <p:nvSpPr>
-          <p:cNvPr id="64" name="TextBox 63"/>
+          </a:p>
+        </p:txBody>
+      </p:sp>
+      <p:sp>
+        <p:nvSpPr>
+          <p:cNvPr id="102" name="TextBox 101"/>
           <p:cNvSpPr txBox="1"/>
           <p:nvPr/>
         </p:nvSpPr>
         <p:spPr>
           <a:xfrm>
-            <a:off x="9180000" y="1519513"/>
+            <a:off x="9180000" y="1260000"/>
             <a:ext cx="2448000" cy="360000"/>
           </a:xfrm>
           <a:prstGeom prst="rect">
@@ -5823,7 +6986,7 @@
           <a:p>
             <a:pPr algn="ctr"/>
             <a:r>
-              <a:rPr sz="1400" b="1" dirty="0" err="1">
+              <a:rPr sz="1400" b="1">
                 <a:solidFill>
                   <a:srgbClr val="203A5C"/>
                 </a:solidFill>
@@ -5831,25 +6994,19 @@
               </a:rPr>
               <a:t>多尺度特征融合</a:t>
             </a:r>
-            <a:endParaRPr sz="1400" b="1" dirty="0">
-              <a:solidFill>
-                <a:srgbClr val="203A5C"/>
-              </a:solidFill>
-              <a:latin typeface="微软雅黑"/>
-            </a:endParaRPr>
-          </a:p>
-        </p:txBody>
-      </p:sp>
-      <p:sp>
-        <p:nvSpPr>
-          <p:cNvPr id="65" name="TextBox 64"/>
+          </a:p>
+        </p:txBody>
+      </p:sp>
+      <p:sp>
+        <p:nvSpPr>
+          <p:cNvPr id="103" name="TextBox 102"/>
           <p:cNvSpPr txBox="1"/>
           <p:nvPr/>
         </p:nvSpPr>
         <p:spPr>
           <a:xfrm>
-            <a:off x="9180000" y="1811381"/>
-            <a:ext cx="2448000" cy="861774"/>
+            <a:off x="9180000" y="1620000"/>
+            <a:ext cx="2448000" cy="720000"/>
           </a:xfrm>
           <a:prstGeom prst="rect">
             <a:avLst/>
@@ -5864,112 +7021,31 @@
           <a:p>
             <a:pPr algn="ctr"/>
             <a:r>
-              <a:rPr sz="1000" b="0" dirty="0" err="1">
+              <a:rPr sz="1000" b="0">
                 <a:solidFill>
                   <a:srgbClr val="000000"/>
                 </a:solidFill>
                 <a:latin typeface="微软雅黑"/>
               </a:rPr>
-              <a:t>拼接上下文与加权特征</a:t>
-            </a:r>
-            <a:r>
-              <a:rPr sz="1000" b="0" dirty="0">
-                <a:solidFill>
-                  <a:srgbClr val="000000"/>
-                </a:solidFill>
-                <a:latin typeface="微软雅黑"/>
-              </a:rPr>
-              <a:t>：
-[ </a:t>
-            </a:r>
-            <a:r>
-              <a:rPr sz="1000" b="0" dirty="0" err="1">
-                <a:solidFill>
-                  <a:srgbClr val="000000"/>
-                </a:solidFill>
-                <a:latin typeface="微软雅黑"/>
-              </a:rPr>
-              <a:t>h_target</a:t>
-            </a:r>
-            <a:r>
-              <a:rPr sz="1000" b="0" dirty="0">
-                <a:solidFill>
-                  <a:srgbClr val="000000"/>
-                </a:solidFill>
-                <a:latin typeface="微软雅黑"/>
-              </a:rPr>
-              <a:t>,
-  </a:t>
-            </a:r>
-            <a:r>
-              <a:rPr sz="1000" b="0" dirty="0" err="1">
-                <a:solidFill>
-                  <a:srgbClr val="000000"/>
-                </a:solidFill>
-                <a:latin typeface="微软雅黑"/>
-              </a:rPr>
-              <a:t>x_target</a:t>
-            </a:r>
-            <a:r>
-              <a:rPr sz="1000" b="0" dirty="0">
-                <a:solidFill>
-                  <a:srgbClr val="000000"/>
-                </a:solidFill>
-                <a:latin typeface="微软雅黑"/>
-              </a:rPr>
-              <a:t>,
-  </a:t>
-            </a:r>
-            <a:r>
-              <a:rPr sz="1000" b="0" dirty="0" err="1">
-                <a:solidFill>
-                  <a:srgbClr val="000000"/>
-                </a:solidFill>
-                <a:latin typeface="微软雅黑"/>
-              </a:rPr>
-              <a:t>weighted_x</a:t>
-            </a:r>
-            <a:r>
-              <a:rPr sz="1000" b="0" dirty="0">
-                <a:solidFill>
-                  <a:srgbClr val="000000"/>
-                </a:solidFill>
-                <a:latin typeface="微软雅黑"/>
-              </a:rPr>
-              <a:t> ]
-</a:t>
-            </a:r>
-            <a:r>
-              <a:rPr sz="1000" b="0" dirty="0" err="1">
-                <a:solidFill>
-                  <a:srgbClr val="000000"/>
-                </a:solidFill>
-                <a:latin typeface="微软雅黑"/>
-              </a:rPr>
-              <a:t>送入全连接层</a:t>
-            </a:r>
-            <a:endParaRPr sz="1000" b="0" dirty="0">
-              <a:solidFill>
-                <a:srgbClr val="000000"/>
-              </a:solidFill>
-              <a:latin typeface="微软雅黑"/>
-            </a:endParaRPr>
+              <a:t>拼接上下文与加权特征：
+[ h_target,
+  x_target,
+  weighted_x ]
+送入全连接层</a:t>
+            </a:r>
           </a:p>
         </p:txBody>
       </p:sp>
       <p:cxnSp>
         <p:nvCxnSpPr>
-          <p:cNvPr id="66" name="Connector 65"/>
-          <p:cNvCxnSpPr>
-            <a:cxnSpLocks/>
-            <a:stCxn id="63" idx="2"/>
-          </p:cNvCxnSpPr>
+          <p:cNvPr id="104" name="Connector 103"/>
+          <p:cNvCxnSpPr/>
           <p:nvPr/>
         </p:nvCxnSpPr>
         <p:spPr>
           <a:xfrm>
-            <a:off x="10404000" y="2717999"/>
-            <a:ext cx="0" cy="342001"/>
+            <a:off x="10404000" y="2520000"/>
+            <a:ext cx="0" cy="540000"/>
           </a:xfrm>
           <a:prstGeom prst="line">
             <a:avLst/>
@@ -5997,7 +7073,7 @@
       </p:cxnSp>
       <p:sp>
         <p:nvSpPr>
-          <p:cNvPr id="67" name="Rounded Rectangle 66"/>
+          <p:cNvPr id="105" name="Rounded Rectangle 104"/>
           <p:cNvSpPr/>
           <p:nvPr/>
         </p:nvSpPr>
@@ -6037,13 +7113,12 @@
           <a:lstStyle/>
           <a:p>
             <a:pPr algn="ctr"/>
-            <a:endParaRPr/>
-          </a:p>
-        </p:txBody>
-      </p:sp>
-      <p:sp>
-        <p:nvSpPr>
-          <p:cNvPr id="68" name="TextBox 67"/>
+          </a:p>
+        </p:txBody>
+      </p:sp>
+      <p:sp>
+        <p:nvSpPr>
+          <p:cNvPr id="106" name="TextBox 105"/>
           <p:cNvSpPr txBox="1"/>
           <p:nvPr/>
         </p:nvSpPr>
@@ -6078,7 +7153,7 @@
       </p:sp>
       <p:sp>
         <p:nvSpPr>
-          <p:cNvPr id="69" name="Rounded Rectangle 68"/>
+          <p:cNvPr id="107" name="Rounded Rectangle 106"/>
           <p:cNvSpPr/>
           <p:nvPr/>
         </p:nvSpPr>
@@ -6114,7 +7189,7 @@
           </a:fontRef>
         </p:style>
         <p:txBody>
-          <a:bodyPr wrap="square" rtlCol="0" anchor="ctr"/>
+          <a:bodyPr rtlCol="0" anchor="ctr" wrap="square"/>
           <a:lstStyle/>
           <a:p>
             <a:pPr algn="ctr"/>
@@ -6132,7 +7207,7 @@
       </p:sp>
       <p:sp>
         <p:nvSpPr>
-          <p:cNvPr id="70" name="Rounded Rectangle 69"/>
+          <p:cNvPr id="108" name="Rounded Rectangle 107"/>
           <p:cNvSpPr/>
           <p:nvPr/>
         </p:nvSpPr>
@@ -6168,7 +7243,7 @@
           </a:fontRef>
         </p:style>
         <p:txBody>
-          <a:bodyPr wrap="square" rtlCol="0" anchor="ctr"/>
+          <a:bodyPr rtlCol="0" anchor="ctr" wrap="square"/>
           <a:lstStyle/>
           <a:p>
             <a:pPr algn="ctr"/>
@@ -6186,7 +7261,7 @@
       </p:sp>
       <p:sp>
         <p:nvSpPr>
-          <p:cNvPr id="71" name="Rounded Rectangle 70"/>
+          <p:cNvPr id="109" name="Rounded Rectangle 108"/>
           <p:cNvSpPr/>
           <p:nvPr/>
         </p:nvSpPr>
@@ -6222,7 +7297,7 @@
           </a:fontRef>
         </p:style>
         <p:txBody>
-          <a:bodyPr wrap="square" rtlCol="0" anchor="ctr"/>
+          <a:bodyPr rtlCol="0" anchor="ctr" wrap="square"/>
           <a:lstStyle/>
           <a:p>
             <a:pPr algn="ctr"/>
